--- a/Portofolio-Analisis-Harga-Pangan.pptx
+++ b/Portofolio-Analisis-Harga-Pangan.pptx
@@ -3093,7 +3093,7 @@
     <p:bg>
       <p:bgPr>
         <a:solidFill>
-          <a:srgbClr val="1E3A8A"/>
+          <a:srgbClr val="F0E8D8"/>
         </a:solidFill>
         <a:effectLst/>
       </p:bgPr>
@@ -3113,8 +3113,8 @@
         </p:nvSpPr>
         <p:spPr>
           <a:xfrm>
-            <a:off x="822960" y="914400"/>
-            <a:ext cx="10515600" cy="1097280"/>
+            <a:off x="502920" y="868680"/>
+            <a:ext cx="6309360" cy="2011680"/>
           </a:xfrm>
           <a:prstGeom prst="rect">
             <a:avLst/>
@@ -3122,23 +3122,52 @@
           <a:noFill/>
         </p:spPr>
         <p:txBody>
-          <a:bodyPr wrap="square">
+          <a:bodyPr wrap="square" lIns="0" rIns="0" tIns="0" bIns="0">
             <a:spAutoFit/>
           </a:bodyPr>
           <a:lstStyle/>
           <a:p>
             <a:pPr>
+              <a:lnSpc>
+                <a:spcPct val="105000"/>
+              </a:lnSpc>
+              <a:spcBef>
+                <a:spcPts val="0"/>
+              </a:spcBef>
               <a:spcAft>
-                <a:spcPts val="800"/>
+                <a:spcPts val="0"/>
               </a:spcAft>
             </a:pPr>
             <a:r>
               <a:rPr sz="3800" b="1" i="0">
                 <a:solidFill>
-                  <a:srgbClr val="FFFFFF"/>
-                </a:solidFill>
-              </a:rPr>
-              <a:t>ANALISIS HARGA PANGAN NASIONAL INDONESIA 2026</a:t>
+                  <a:srgbClr val="2A1E33"/>
+                </a:solidFill>
+                <a:latin typeface="Noto Sans"/>
+              </a:rPr>
+              <a:t>Analisis Harga Pangan</a:t>
+            </a:r>
+          </a:p>
+          <a:p>
+            <a:pPr>
+              <a:lnSpc>
+                <a:spcPct val="105000"/>
+              </a:lnSpc>
+              <a:spcBef>
+                <a:spcPts val="0"/>
+              </a:spcBef>
+              <a:spcAft>
+                <a:spcPts val="0"/>
+              </a:spcAft>
+            </a:pPr>
+            <a:r>
+              <a:rPr sz="3800" b="1" i="0">
+                <a:solidFill>
+                  <a:srgbClr val="5E2A72"/>
+                </a:solidFill>
+                <a:latin typeface="Noto Sans"/>
+              </a:rPr>
+              <a:t>Nasional Indonesia 2026</a:t>
             </a:r>
           </a:p>
         </p:txBody>
@@ -3151,8 +3180,8 @@
         </p:nvSpPr>
         <p:spPr>
           <a:xfrm>
-            <a:off x="822960" y="2194560"/>
-            <a:ext cx="10515600" cy="914400"/>
+            <a:off x="502920" y="2606040"/>
+            <a:ext cx="5852160" cy="1188720"/>
           </a:xfrm>
           <a:prstGeom prst="rect">
             <a:avLst/>
@@ -3160,23 +3189,30 @@
           <a:noFill/>
         </p:spPr>
         <p:txBody>
-          <a:bodyPr wrap="square">
+          <a:bodyPr wrap="square" lIns="0" rIns="0" tIns="0" bIns="0">
             <a:spAutoFit/>
           </a:bodyPr>
           <a:lstStyle/>
           <a:p>
             <a:pPr>
+              <a:lnSpc>
+                <a:spcPct val="120000"/>
+              </a:lnSpc>
+              <a:spcBef>
+                <a:spcPts val="0"/>
+              </a:spcBef>
               <a:spcAft>
-                <a:spcPts val="800"/>
+                <a:spcPts val="0"/>
               </a:spcAft>
             </a:pPr>
             <a:r>
-              <a:rPr sz="2000" b="0" i="0">
-                <a:solidFill>
-                  <a:srgbClr val="FFFFFF"/>
-                </a:solidFill>
-              </a:rPr>
-              <a:t>Beras, Daging Sapi, Minyak Goreng, Gula Pasir: Tren, Volatilitas, dan Disparitas Provinsi</a:t>
+              <a:rPr sz="1750" b="0" i="0">
+                <a:solidFill>
+                  <a:srgbClr val="2A1E33"/>
+                </a:solidFill>
+                <a:latin typeface="Noto Sans"/>
+              </a:rPr>
+              <a:t>Beras, daging sapi, minyak goreng, gula pasir: tren, volatilitas, dan disparitas provinsi.</a:t>
             </a:r>
           </a:p>
         </p:txBody>
@@ -3189,8 +3225,8 @@
         </p:nvSpPr>
         <p:spPr>
           <a:xfrm>
-            <a:off x="822960" y="3383280"/>
-            <a:ext cx="10515600" cy="1828800"/>
+            <a:off x="502920" y="4114800"/>
+            <a:ext cx="5943600" cy="914400"/>
           </a:xfrm>
           <a:prstGeom prst="rect">
             <a:avLst/>
@@ -3198,52 +3234,181 @@
           <a:noFill/>
         </p:spPr>
         <p:txBody>
-          <a:bodyPr wrap="square">
+          <a:bodyPr wrap="square" lIns="0" rIns="0" tIns="0" bIns="0">
             <a:spAutoFit/>
           </a:bodyPr>
           <a:lstStyle/>
           <a:p>
             <a:pPr>
+              <a:lnSpc>
+                <a:spcPct val="125000"/>
+              </a:lnSpc>
+              <a:spcBef>
+                <a:spcPts val="0"/>
+              </a:spcBef>
               <a:spcAft>
-                <a:spcPts val="800"/>
+                <a:spcPts val="0"/>
               </a:spcAft>
             </a:pPr>
             <a:r>
-              <a:rPr sz="1600" b="0" i="0">
-                <a:solidFill>
-                  <a:srgbClr val="FFFFFF"/>
-                </a:solidFill>
-              </a:rPr>
-              <a:t>Data harian PIHPS / Bank Indonesia — 13 komoditas, 34 provinsi, 1 Januari 2025 sampai 19 Oktober 2026</a:t>
-            </a:r>
-          </a:p>
+              <a:rPr sz="1300" b="0" i="0">
+                <a:solidFill>
+                  <a:srgbClr val="2A1E33"/>
+                </a:solidFill>
+                <a:latin typeface="Noto Sans"/>
+              </a:rPr>
+              <a:t>Data harian PIHPS / Bank Indonesia: 13 komoditas, 34 provinsi, 1 Januari 2025 sampai 19 Oktober 2026.</a:t>
+            </a:r>
+          </a:p>
+        </p:txBody>
+      </p:sp>
+      <p:sp>
+        <p:nvSpPr>
+          <p:cNvPr id="5" name="TextBox 4"/>
+          <p:cNvSpPr txBox="1"/>
+          <p:nvPr/>
+        </p:nvSpPr>
+        <p:spPr>
+          <a:xfrm>
+            <a:off x="502920" y="5989320"/>
+            <a:ext cx="5943600" cy="457200"/>
+          </a:xfrm>
+          <a:prstGeom prst="rect">
+            <a:avLst/>
+          </a:prstGeom>
+          <a:noFill/>
+        </p:spPr>
+        <p:txBody>
+          <a:bodyPr wrap="square" lIns="0" rIns="0" tIns="0" bIns="0">
+            <a:spAutoFit/>
+          </a:bodyPr>
+          <a:lstStyle/>
           <a:p>
             <a:pPr>
+              <a:lnSpc>
+                <a:spcPct val="100000"/>
+              </a:lnSpc>
+              <a:spcBef>
+                <a:spcPts val="0"/>
+              </a:spcBef>
               <a:spcAft>
-                <a:spcPts val="800"/>
+                <a:spcPts val="0"/>
               </a:spcAft>
             </a:pPr>
             <a:r>
-              <a:rPr sz="1600" b="0" i="0">
-                <a:solidFill>
-                  <a:srgbClr val="FFFFFF"/>
-                </a:solidFill>
-              </a:rPr>
-              <a:t>Plus: paket dashboard Power BI (star schema, DAX, panduan rakit)</a:t>
-            </a:r>
-          </a:p>
-        </p:txBody>
-      </p:sp>
-      <p:sp>
-        <p:nvSpPr>
-          <p:cNvPr id="5" name="TextBox 4"/>
+              <a:rPr sz="1400" b="1" i="0">
+                <a:solidFill>
+                  <a:srgbClr val="5E2A72"/>
+                </a:solidFill>
+                <a:latin typeface="Noto Sans"/>
+              </a:rPr>
+              <a:t>BAGHIZ ASSHIDDIQIE ARASYA</a:t>
+            </a:r>
+          </a:p>
+        </p:txBody>
+      </p:sp>
+      <p:sp>
+        <p:nvSpPr>
+          <p:cNvPr id="6" name="Rounded Rectangle 5"/>
+          <p:cNvSpPr/>
+          <p:nvPr/>
+        </p:nvSpPr>
+        <p:spPr>
+          <a:xfrm>
+            <a:off x="6812280" y="777240"/>
+            <a:ext cx="4892040" cy="4160520"/>
+          </a:xfrm>
+          <a:prstGeom prst="roundRect">
+            <a:avLst>
+              <a:gd name="adj" fmla="val 6153"/>
+            </a:avLst>
+          </a:prstGeom>
+          <a:solidFill>
+            <a:srgbClr val="8A5CA6"/>
+          </a:solidFill>
+          <a:ln>
+            <a:noFill/>
+          </a:ln>
+          <a:effectLst/>
+        </p:spPr>
+        <p:style>
+          <a:lnRef idx="1">
+            <a:schemeClr val="accent1"/>
+          </a:lnRef>
+          <a:fillRef idx="3">
+            <a:schemeClr val="accent1"/>
+          </a:fillRef>
+          <a:effectRef idx="2">
+            <a:schemeClr val="accent1"/>
+          </a:effectRef>
+          <a:fontRef idx="minor">
+            <a:schemeClr val="lt1"/>
+          </a:fontRef>
+        </p:style>
+        <p:txBody>
+          <a:bodyPr rtlCol="0" anchor="ctr"/>
+          <a:lstStyle/>
+          <a:p>
+            <a:pPr algn="ctr"/>
+          </a:p>
+        </p:txBody>
+      </p:sp>
+      <p:sp>
+        <p:nvSpPr>
+          <p:cNvPr id="7" name="Rounded Rectangle 6"/>
+          <p:cNvSpPr/>
+          <p:nvPr/>
+        </p:nvSpPr>
+        <p:spPr>
+          <a:xfrm>
+            <a:off x="6885432" y="850392"/>
+            <a:ext cx="4745736" cy="4014215"/>
+          </a:xfrm>
+          <a:prstGeom prst="roundRect">
+            <a:avLst>
+              <a:gd name="adj" fmla="val 4555"/>
+            </a:avLst>
+          </a:prstGeom>
+          <a:solidFill>
+            <a:srgbClr val="5E2A72"/>
+          </a:solidFill>
+          <a:ln>
+            <a:noFill/>
+          </a:ln>
+          <a:effectLst/>
+        </p:spPr>
+        <p:style>
+          <a:lnRef idx="1">
+            <a:schemeClr val="accent1"/>
+          </a:lnRef>
+          <a:fillRef idx="3">
+            <a:schemeClr val="accent1"/>
+          </a:fillRef>
+          <a:effectRef idx="2">
+            <a:schemeClr val="accent1"/>
+          </a:effectRef>
+          <a:fontRef idx="minor">
+            <a:schemeClr val="lt1"/>
+          </a:fontRef>
+        </p:style>
+        <p:txBody>
+          <a:bodyPr rtlCol="0" anchor="ctr"/>
+          <a:lstStyle/>
+          <a:p>
+            <a:pPr algn="ctr"/>
+          </a:p>
+        </p:txBody>
+      </p:sp>
+      <p:sp>
+        <p:nvSpPr>
+          <p:cNvPr id="8" name="TextBox 7"/>
           <p:cNvSpPr txBox="1"/>
           <p:nvPr/>
         </p:nvSpPr>
         <p:spPr>
           <a:xfrm>
-            <a:off x="822960" y="5486400"/>
-            <a:ext cx="10515600" cy="731520"/>
+            <a:off x="7269480" y="1234440"/>
+            <a:ext cx="4023360" cy="3474720"/>
           </a:xfrm>
           <a:prstGeom prst="rect">
             <a:avLst/>
@@ -3251,23 +3416,187 @@
           <a:noFill/>
         </p:spPr>
         <p:txBody>
-          <a:bodyPr wrap="square">
+          <a:bodyPr wrap="square" lIns="0" rIns="0" tIns="0" bIns="0">
             <a:spAutoFit/>
           </a:bodyPr>
           <a:lstStyle/>
           <a:p>
             <a:pPr>
+              <a:lnSpc>
+                <a:spcPct val="100000"/>
+              </a:lnSpc>
+              <a:spcBef>
+                <a:spcPts val="0"/>
+              </a:spcBef>
               <a:spcAft>
-                <a:spcPts val="800"/>
+                <a:spcPts val="600"/>
               </a:spcAft>
             </a:pPr>
             <a:r>
-              <a:rPr sz="2000" b="1" i="0">
+              <a:rPr sz="1300" b="1" i="0">
+                <a:solidFill>
+                  <a:srgbClr val="F8F2E4"/>
+                </a:solidFill>
+                <a:latin typeface="Noto Sans"/>
+              </a:rPr>
+              <a:t>KENAIKAN TERTINGGI 2026</a:t>
+            </a:r>
+          </a:p>
+          <a:p>
+            <a:pPr>
+              <a:lnSpc>
+                <a:spcPct val="100000"/>
+              </a:lnSpc>
+              <a:spcBef>
+                <a:spcPts val="0"/>
+              </a:spcBef>
+              <a:spcAft>
+                <a:spcPts val="400"/>
+              </a:spcAft>
+            </a:pPr>
+            <a:r>
+              <a:rPr sz="7600" b="1" i="0">
+                <a:solidFill>
+                  <a:srgbClr val="EF7D1A"/>
+                </a:solidFill>
+                <a:latin typeface="Noto Sans"/>
+              </a:rPr>
+              <a:t>+6,7%</a:t>
+            </a:r>
+          </a:p>
+          <a:p>
+            <a:pPr>
+              <a:lnSpc>
+                <a:spcPct val="100000"/>
+              </a:lnSpc>
+              <a:spcBef>
+                <a:spcPts val="0"/>
+              </a:spcBef>
+              <a:spcAft>
+                <a:spcPts val="600"/>
+              </a:spcAft>
+            </a:pPr>
+            <a:r>
+              <a:rPr sz="2100" b="1" i="0">
                 <a:solidFill>
                   <a:srgbClr val="FFFFFF"/>
                 </a:solidFill>
-              </a:rPr>
-              <a:t>BAGHIZ ASSHIDDIQIE ARASYA</a:t>
+                <a:latin typeface="Noto Sans"/>
+              </a:rPr>
+              <a:t>Minyak Goreng</a:t>
+            </a:r>
+          </a:p>
+          <a:p>
+            <a:pPr>
+              <a:lnSpc>
+                <a:spcPct val="125000"/>
+              </a:lnSpc>
+              <a:spcBef>
+                <a:spcPts val="0"/>
+              </a:spcBef>
+              <a:spcAft>
+                <a:spcPts val="0"/>
+              </a:spcAft>
+            </a:pPr>
+            <a:r>
+              <a:rPr sz="1350" b="0" i="0">
+                <a:solidFill>
+                  <a:srgbClr val="F8F2E4"/>
+                </a:solidFill>
+                <a:latin typeface="Noto Sans"/>
+              </a:rPr>
+              <a:t>Rata-rata Rp20.753 menjadi Rp22.146 per kg, tertinggi dari empat kelompok bahan pokok.</a:t>
+            </a:r>
+          </a:p>
+        </p:txBody>
+      </p:sp>
+      <p:sp>
+        <p:nvSpPr>
+          <p:cNvPr id="9" name="Rounded Rectangle 8"/>
+          <p:cNvSpPr/>
+          <p:nvPr/>
+        </p:nvSpPr>
+        <p:spPr>
+          <a:xfrm>
+            <a:off x="6812280" y="5230368"/>
+            <a:ext cx="4892040" cy="713232"/>
+          </a:xfrm>
+          <a:prstGeom prst="roundRect">
+            <a:avLst>
+              <a:gd name="adj" fmla="val 17948"/>
+            </a:avLst>
+          </a:prstGeom>
+          <a:solidFill>
+            <a:srgbClr val="EF7D1A"/>
+          </a:solidFill>
+          <a:ln>
+            <a:noFill/>
+          </a:ln>
+          <a:effectLst/>
+        </p:spPr>
+        <p:style>
+          <a:lnRef idx="1">
+            <a:schemeClr val="accent1"/>
+          </a:lnRef>
+          <a:fillRef idx="3">
+            <a:schemeClr val="accent1"/>
+          </a:fillRef>
+          <a:effectRef idx="2">
+            <a:schemeClr val="accent1"/>
+          </a:effectRef>
+          <a:fontRef idx="minor">
+            <a:schemeClr val="lt1"/>
+          </a:fontRef>
+        </p:style>
+        <p:txBody>
+          <a:bodyPr rtlCol="0" anchor="ctr"/>
+          <a:lstStyle/>
+          <a:p>
+            <a:pPr algn="ctr"/>
+          </a:p>
+        </p:txBody>
+      </p:sp>
+      <p:sp>
+        <p:nvSpPr>
+          <p:cNvPr id="10" name="TextBox 9"/>
+          <p:cNvSpPr txBox="1"/>
+          <p:nvPr/>
+        </p:nvSpPr>
+        <p:spPr>
+          <a:xfrm>
+            <a:off x="7086600" y="5358384"/>
+            <a:ext cx="4434840" cy="502920"/>
+          </a:xfrm>
+          <a:prstGeom prst="rect">
+            <a:avLst/>
+          </a:prstGeom>
+          <a:noFill/>
+        </p:spPr>
+        <p:txBody>
+          <a:bodyPr wrap="square" lIns="0" rIns="0" tIns="0" bIns="0">
+            <a:spAutoFit/>
+          </a:bodyPr>
+          <a:lstStyle/>
+          <a:p>
+            <a:pPr>
+              <a:lnSpc>
+                <a:spcPct val="115000"/>
+              </a:lnSpc>
+              <a:spcBef>
+                <a:spcPts val="0"/>
+              </a:spcBef>
+              <a:spcAft>
+                <a:spcPts val="0"/>
+              </a:spcAft>
+            </a:pPr>
+            <a:r>
+              <a:rPr sz="1300" b="1" i="0">
+                <a:solidFill>
+                  <a:srgbClr val="FFFFFF"/>
+                </a:solidFill>
+                <a:latin typeface="Noto Sans"/>
+              </a:rPr>
+              <a:t>Plus paket dashboard Power BI: star schema, DAX, panduan rakit.</a:t>
             </a:r>
           </a:p>
         </p:txBody>
@@ -3286,7 +3615,7 @@
     <p:bg>
       <p:bgPr>
         <a:solidFill>
-          <a:srgbClr val="FFFFFF"/>
+          <a:srgbClr val="F0E8D8"/>
         </a:solidFill>
         <a:effectLst/>
       </p:bgPr>
@@ -3306,8 +3635,8 @@
         </p:nvSpPr>
         <p:spPr>
           <a:xfrm>
-            <a:off x="640080" y="274320"/>
-            <a:ext cx="10881360" cy="822960"/>
+            <a:off x="502920" y="384048"/>
+            <a:ext cx="11155680" cy="914400"/>
           </a:xfrm>
           <a:prstGeom prst="rect">
             <a:avLst/>
@@ -3315,21 +3644,28 @@
           <a:noFill/>
         </p:spPr>
         <p:txBody>
-          <a:bodyPr wrap="square">
+          <a:bodyPr wrap="square" lIns="0" rIns="0" tIns="0" bIns="0">
             <a:spAutoFit/>
           </a:bodyPr>
           <a:lstStyle/>
           <a:p>
             <a:pPr>
+              <a:lnSpc>
+                <a:spcPct val="100000"/>
+              </a:lnSpc>
+              <a:spcBef>
+                <a:spcPts val="0"/>
+              </a:spcBef>
               <a:spcAft>
-                <a:spcPts val="800"/>
+                <a:spcPts val="0"/>
               </a:spcAft>
             </a:pPr>
             <a:r>
-              <a:rPr sz="3000" b="1" i="0">
-                <a:solidFill>
-                  <a:srgbClr val="1E3A8A"/>
-                </a:solidFill>
+              <a:rPr sz="3100" b="1" i="0">
+                <a:solidFill>
+                  <a:srgbClr val="2A1E33"/>
+                </a:solidFill>
+                <a:latin typeface="Noto Sans"/>
               </a:rPr>
               <a:t>Penutup</a:t>
             </a:r>
@@ -3338,24 +3674,27 @@
       </p:sp>
       <p:sp>
         <p:nvSpPr>
-          <p:cNvPr id="3" name="Rectangle 2"/>
+          <p:cNvPr id="3" name="Rounded Rectangle 2"/>
           <p:cNvSpPr/>
           <p:nvPr/>
         </p:nvSpPr>
         <p:spPr>
           <a:xfrm>
-            <a:off x="640080" y="1051560"/>
-            <a:ext cx="1371600" cy="54864"/>
-          </a:xfrm>
-          <a:prstGeom prst="rect">
-            <a:avLst/>
+            <a:off x="521208" y="1097280"/>
+            <a:ext cx="777240" cy="82296"/>
+          </a:xfrm>
+          <a:prstGeom prst="roundRect">
+            <a:avLst>
+              <a:gd name="adj" fmla="val 50000"/>
+            </a:avLst>
           </a:prstGeom>
           <a:solidFill>
-            <a:srgbClr val="0E7C7B"/>
+            <a:srgbClr val="EF7D1A"/>
           </a:solidFill>
           <a:ln>
             <a:noFill/>
           </a:ln>
+          <a:effectLst/>
         </p:spPr>
         <p:style>
           <a:lnRef idx="1">
@@ -3381,14 +3720,106 @@
       </p:sp>
       <p:sp>
         <p:nvSpPr>
-          <p:cNvPr id="4" name="TextBox 3"/>
+          <p:cNvPr id="4" name="Rounded Rectangle 3"/>
+          <p:cNvSpPr/>
+          <p:nvPr/>
+        </p:nvSpPr>
+        <p:spPr>
+          <a:xfrm>
+            <a:off x="502920" y="1371600"/>
+            <a:ext cx="6720840" cy="3246120"/>
+          </a:xfrm>
+          <a:prstGeom prst="roundRect">
+            <a:avLst>
+              <a:gd name="adj" fmla="val 7042"/>
+            </a:avLst>
+          </a:prstGeom>
+          <a:solidFill>
+            <a:srgbClr val="DDCFB4"/>
+          </a:solidFill>
+          <a:ln>
+            <a:noFill/>
+          </a:ln>
+          <a:effectLst/>
+        </p:spPr>
+        <p:style>
+          <a:lnRef idx="1">
+            <a:schemeClr val="accent1"/>
+          </a:lnRef>
+          <a:fillRef idx="3">
+            <a:schemeClr val="accent1"/>
+          </a:fillRef>
+          <a:effectRef idx="2">
+            <a:schemeClr val="accent1"/>
+          </a:effectRef>
+          <a:fontRef idx="minor">
+            <a:schemeClr val="lt1"/>
+          </a:fontRef>
+        </p:style>
+        <p:txBody>
+          <a:bodyPr rtlCol="0" anchor="ctr"/>
+          <a:lstStyle/>
+          <a:p>
+            <a:pPr algn="ctr"/>
+          </a:p>
+        </p:txBody>
+      </p:sp>
+      <p:sp>
+        <p:nvSpPr>
+          <p:cNvPr id="5" name="Rounded Rectangle 4"/>
+          <p:cNvSpPr/>
+          <p:nvPr/>
+        </p:nvSpPr>
+        <p:spPr>
+          <a:xfrm>
+            <a:off x="566928" y="1435608"/>
+            <a:ext cx="6592824" cy="3118103"/>
+          </a:xfrm>
+          <a:prstGeom prst="roundRect">
+            <a:avLst>
+              <a:gd name="adj" fmla="val 5278"/>
+            </a:avLst>
+          </a:prstGeom>
+          <a:solidFill>
+            <a:srgbClr val="F8F2E4"/>
+          </a:solidFill>
+          <a:ln>
+            <a:noFill/>
+          </a:ln>
+          <a:effectLst/>
+        </p:spPr>
+        <p:style>
+          <a:lnRef idx="1">
+            <a:schemeClr val="accent1"/>
+          </a:lnRef>
+          <a:fillRef idx="3">
+            <a:schemeClr val="accent1"/>
+          </a:fillRef>
+          <a:effectRef idx="2">
+            <a:schemeClr val="accent1"/>
+          </a:effectRef>
+          <a:fontRef idx="minor">
+            <a:schemeClr val="lt1"/>
+          </a:fontRef>
+        </p:style>
+        <p:txBody>
+          <a:bodyPr rtlCol="0" anchor="ctr"/>
+          <a:lstStyle/>
+          <a:p>
+            <a:pPr algn="ctr"/>
+          </a:p>
+        </p:txBody>
+      </p:sp>
+      <p:sp>
+        <p:nvSpPr>
+          <p:cNvPr id="6" name="TextBox 5"/>
           <p:cNvSpPr txBox="1"/>
           <p:nvPr/>
         </p:nvSpPr>
         <p:spPr>
           <a:xfrm>
-            <a:off x="640080" y="1371600"/>
-            <a:ext cx="10881360" cy="4754880"/>
+            <a:off x="868680" y="1691640"/>
+            <a:ext cx="6035040" cy="2697480"/>
           </a:xfrm>
           <a:prstGeom prst="rect">
             <a:avLst/>
@@ -3396,84 +3827,436 @@
           <a:noFill/>
         </p:spPr>
         <p:txBody>
-          <a:bodyPr wrap="square">
+          <a:bodyPr wrap="square" lIns="0" rIns="0" tIns="0" bIns="0">
             <a:spAutoFit/>
           </a:bodyPr>
           <a:lstStyle/>
           <a:p>
-            <a:pPr marL="171450" indent="-171450">
+            <a:pPr>
+              <a:lnSpc>
+                <a:spcPct val="100000"/>
+              </a:lnSpc>
               <a:spcBef>
-                <a:spcPts val="200"/>
+                <a:spcPts val="0"/>
               </a:spcBef>
               <a:spcAft>
-                <a:spcPts val="1000"/>
+                <a:spcPts val="800"/>
               </a:spcAft>
-              <a:buChar char="•"/>
             </a:pPr>
             <a:r>
-              <a:rPr sz="1700" b="0" i="0">
-                <a:solidFill>
-                  <a:srgbClr val="1F2937"/>
-                </a:solidFill>
-              </a:rPr>
-              <a:t>Tiga pesan utama: (1) Minyak goreng naik tertinggi (+6,7%) dan paling liar — pantau curah; (2) 13 Okt 2026 adalah puncak tekanan harga pangan nasional; (3) disparitas 36–41% antarprovinsi menuntut perhatian logistik, bukan cuma produksi.</a:t>
-            </a:r>
-          </a:p>
-          <a:p>
-            <a:pPr marL="171450" indent="-171450">
+              <a:rPr sz="1600" b="1" i="0">
+                <a:solidFill>
+                  <a:srgbClr val="5E2A72"/>
+                </a:solidFill>
+                <a:latin typeface="Noto Sans"/>
+              </a:rPr>
+              <a:t>Tiga pesan utama</a:t>
+            </a:r>
+          </a:p>
+          <a:p>
+            <a:pPr>
+              <a:lnSpc>
+                <a:spcPct val="125000"/>
+              </a:lnSpc>
               <a:spcBef>
-                <a:spcPts val="200"/>
+                <a:spcPts val="0"/>
               </a:spcBef>
               <a:spcAft>
-                <a:spcPts val="1000"/>
+                <a:spcPts val="0"/>
               </a:spcAft>
-              <a:buChar char="•"/>
             </a:pPr>
             <a:r>
-              <a:rPr sz="1700" b="0" i="0">
-                <a:solidFill>
-                  <a:srgbClr val="1F2937"/>
-                </a:solidFill>
-              </a:rPr>
-              <a:t>Paket dashboard Power BI tersedia di folder powerbi/: star schema 5 tabel, measure DAX siap tempel (dengan catatan level nasional vs provinsi), layout 4 halaman, dan panduan rakit langkah demi langkah.</a:t>
-            </a:r>
-          </a:p>
-          <a:p>
-            <a:pPr marL="171450" indent="-171450">
+              <a:rPr sz="1500" b="0" i="0">
+                <a:solidFill>
+                  <a:srgbClr val="2A1E33"/>
+                </a:solidFill>
+                <a:latin typeface="Noto Sans"/>
+              </a:rPr>
+              <a:t>(1) Minyak goreng naik tertinggi (+6,7%) dan paling liar, pantau curah; (2) 13 Okt 2026 adalah puncak tekanan harga pangan nasional; (3) disparitas 36-41% antarprovinsi menuntut perhatian logistik, bukan cuma produksi.</a:t>
+            </a:r>
+          </a:p>
+        </p:txBody>
+      </p:sp>
+      <p:sp>
+        <p:nvSpPr>
+          <p:cNvPr id="7" name="Rounded Rectangle 6"/>
+          <p:cNvSpPr/>
+          <p:nvPr/>
+        </p:nvSpPr>
+        <p:spPr>
+          <a:xfrm>
+            <a:off x="7543800" y="1371600"/>
+            <a:ext cx="4142232" cy="1536192"/>
+          </a:xfrm>
+          <a:prstGeom prst="roundRect">
+            <a:avLst>
+              <a:gd name="adj" fmla="val 9523"/>
+            </a:avLst>
+          </a:prstGeom>
+          <a:solidFill>
+            <a:srgbClr val="5E2A72"/>
+          </a:solidFill>
+          <a:ln>
+            <a:noFill/>
+          </a:ln>
+          <a:effectLst/>
+        </p:spPr>
+        <p:style>
+          <a:lnRef idx="1">
+            <a:schemeClr val="accent1"/>
+          </a:lnRef>
+          <a:fillRef idx="3">
+            <a:schemeClr val="accent1"/>
+          </a:fillRef>
+          <a:effectRef idx="2">
+            <a:schemeClr val="accent1"/>
+          </a:effectRef>
+          <a:fontRef idx="minor">
+            <a:schemeClr val="lt1"/>
+          </a:fontRef>
+        </p:style>
+        <p:txBody>
+          <a:bodyPr rtlCol="0" anchor="ctr"/>
+          <a:lstStyle/>
+          <a:p>
+            <a:pPr algn="ctr"/>
+          </a:p>
+        </p:txBody>
+      </p:sp>
+      <p:sp>
+        <p:nvSpPr>
+          <p:cNvPr id="8" name="TextBox 7"/>
+          <p:cNvSpPr txBox="1"/>
+          <p:nvPr/>
+        </p:nvSpPr>
+        <p:spPr>
+          <a:xfrm>
+            <a:off x="7863840" y="1627632"/>
+            <a:ext cx="3520440" cy="1097280"/>
+          </a:xfrm>
+          <a:prstGeom prst="rect">
+            <a:avLst/>
+          </a:prstGeom>
+          <a:noFill/>
+        </p:spPr>
+        <p:txBody>
+          <a:bodyPr wrap="square" lIns="0" rIns="0" tIns="0" bIns="0">
+            <a:spAutoFit/>
+          </a:bodyPr>
+          <a:lstStyle/>
+          <a:p>
+            <a:pPr>
+              <a:lnSpc>
+                <a:spcPct val="100000"/>
+              </a:lnSpc>
               <a:spcBef>
-                <a:spcPts val="200"/>
+                <a:spcPts val="0"/>
               </a:spcBef>
               <a:spcAft>
-                <a:spcPts val="1000"/>
+                <a:spcPts val="400"/>
               </a:spcAft>
-              <a:buChar char="•"/>
             </a:pPr>
             <a:r>
-              <a:rPr sz="1700" b="0" i="0">
-                <a:solidFill>
-                  <a:srgbClr val="1F2937"/>
-                </a:solidFill>
-              </a:rPr>
-              <a:t>Semua angka dapat direproduksi: jalankan scripts/fetch_pihps.py lalu scripts/analyze.py — findings.json dan 12 chart dihitung ulang dari nol.</a:t>
-            </a:r>
-          </a:p>
-          <a:p>
-            <a:pPr marL="171450" indent="-171450">
+              <a:rPr sz="1500" b="1" i="0">
+                <a:solidFill>
+                  <a:srgbClr val="EF7D1A"/>
+                </a:solidFill>
+                <a:latin typeface="Noto Sans"/>
+              </a:rPr>
+              <a:t>Dashboard Power BI</a:t>
+            </a:r>
+          </a:p>
+          <a:p>
+            <a:pPr>
+              <a:lnSpc>
+                <a:spcPct val="120000"/>
+              </a:lnSpc>
               <a:spcBef>
-                <a:spcPts val="200"/>
+                <a:spcPts val="0"/>
               </a:spcBef>
               <a:spcAft>
-                <a:spcPts val="1000"/>
+                <a:spcPts val="0"/>
               </a:spcAft>
-              <a:buChar char="•"/>
             </a:pPr>
             <a:r>
-              <a:rPr sz="1700" b="0" i="0">
-                <a:solidFill>
-                  <a:srgbClr val="1F2937"/>
-                </a:solidFill>
-              </a:rPr>
-              <a:t>Terima kasih.</a:t>
+              <a:rPr sz="1250" b="0" i="0">
+                <a:solidFill>
+                  <a:srgbClr val="F8F2E4"/>
+                </a:solidFill>
+                <a:latin typeface="Noto Sans"/>
+              </a:rPr>
+              <a:t>Star schema 5 tabel, measure DAX siap tempel, layout 4 halaman, panduan rakit langkah demi langkah.</a:t>
+            </a:r>
+          </a:p>
+        </p:txBody>
+      </p:sp>
+      <p:sp>
+        <p:nvSpPr>
+          <p:cNvPr id="9" name="Rounded Rectangle 8"/>
+          <p:cNvSpPr/>
+          <p:nvPr/>
+        </p:nvSpPr>
+        <p:spPr>
+          <a:xfrm>
+            <a:off x="7543800" y="3081528"/>
+            <a:ext cx="4142232" cy="1536192"/>
+          </a:xfrm>
+          <a:prstGeom prst="roundRect">
+            <a:avLst>
+              <a:gd name="adj" fmla="val 9523"/>
+            </a:avLst>
+          </a:prstGeom>
+          <a:solidFill>
+            <a:srgbClr val="F8F2E4"/>
+          </a:solidFill>
+          <a:ln>
+            <a:noFill/>
+          </a:ln>
+          <a:effectLst/>
+        </p:spPr>
+        <p:style>
+          <a:lnRef idx="1">
+            <a:schemeClr val="accent1"/>
+          </a:lnRef>
+          <a:fillRef idx="3">
+            <a:schemeClr val="accent1"/>
+          </a:fillRef>
+          <a:effectRef idx="2">
+            <a:schemeClr val="accent1"/>
+          </a:effectRef>
+          <a:fontRef idx="minor">
+            <a:schemeClr val="lt1"/>
+          </a:fontRef>
+        </p:style>
+        <p:txBody>
+          <a:bodyPr rtlCol="0" anchor="ctr"/>
+          <a:lstStyle/>
+          <a:p>
+            <a:pPr algn="ctr"/>
+          </a:p>
+        </p:txBody>
+      </p:sp>
+      <p:sp>
+        <p:nvSpPr>
+          <p:cNvPr id="10" name="TextBox 9"/>
+          <p:cNvSpPr txBox="1"/>
+          <p:nvPr/>
+        </p:nvSpPr>
+        <p:spPr>
+          <a:xfrm>
+            <a:off x="7863840" y="3337560"/>
+            <a:ext cx="3520440" cy="1097280"/>
+          </a:xfrm>
+          <a:prstGeom prst="rect">
+            <a:avLst/>
+          </a:prstGeom>
+          <a:noFill/>
+        </p:spPr>
+        <p:txBody>
+          <a:bodyPr wrap="square" lIns="0" rIns="0" tIns="0" bIns="0">
+            <a:spAutoFit/>
+          </a:bodyPr>
+          <a:lstStyle/>
+          <a:p>
+            <a:pPr>
+              <a:lnSpc>
+                <a:spcPct val="100000"/>
+              </a:lnSpc>
+              <a:spcBef>
+                <a:spcPts val="0"/>
+              </a:spcBef>
+              <a:spcAft>
+                <a:spcPts val="400"/>
+              </a:spcAft>
+            </a:pPr>
+            <a:r>
+              <a:rPr sz="1500" b="1" i="0">
+                <a:solidFill>
+                  <a:srgbClr val="5E2A72"/>
+                </a:solidFill>
+                <a:latin typeface="Noto Sans"/>
+              </a:rPr>
+              <a:t>Terbuka untuk direproduksi</a:t>
+            </a:r>
+          </a:p>
+          <a:p>
+            <a:pPr>
+              <a:lnSpc>
+                <a:spcPct val="120000"/>
+              </a:lnSpc>
+              <a:spcBef>
+                <a:spcPts val="0"/>
+              </a:spcBef>
+              <a:spcAft>
+                <a:spcPts val="0"/>
+              </a:spcAft>
+            </a:pPr>
+            <a:r>
+              <a:rPr sz="1250" b="0" i="0">
+                <a:solidFill>
+                  <a:srgbClr val="2A1E33"/>
+                </a:solidFill>
+                <a:latin typeface="Noto Sans"/>
+              </a:rPr>
+              <a:t>Jalankan scripts/fetch_pihps.py lalu scripts/analyze.py: findings.json dan 12 chart dihitung ulang dari nol.</a:t>
+            </a:r>
+          </a:p>
+        </p:txBody>
+      </p:sp>
+      <p:sp>
+        <p:nvSpPr>
+          <p:cNvPr id="11" name="Rounded Rectangle 10"/>
+          <p:cNvSpPr/>
+          <p:nvPr/>
+        </p:nvSpPr>
+        <p:spPr>
+          <a:xfrm>
+            <a:off x="502920" y="4892040"/>
+            <a:ext cx="11183112" cy="1463040"/>
+          </a:xfrm>
+          <a:prstGeom prst="roundRect">
+            <a:avLst>
+              <a:gd name="adj" fmla="val 11249"/>
+            </a:avLst>
+          </a:prstGeom>
+          <a:solidFill>
+            <a:srgbClr val="5E2A72"/>
+          </a:solidFill>
+          <a:ln>
+            <a:noFill/>
+          </a:ln>
+          <a:effectLst/>
+        </p:spPr>
+        <p:style>
+          <a:lnRef idx="1">
+            <a:schemeClr val="accent1"/>
+          </a:lnRef>
+          <a:fillRef idx="3">
+            <a:schemeClr val="accent1"/>
+          </a:fillRef>
+          <a:effectRef idx="2">
+            <a:schemeClr val="accent1"/>
+          </a:effectRef>
+          <a:fontRef idx="minor">
+            <a:schemeClr val="lt1"/>
+          </a:fontRef>
+        </p:style>
+        <p:txBody>
+          <a:bodyPr rtlCol="0" anchor="ctr"/>
+          <a:lstStyle/>
+          <a:p>
+            <a:pPr algn="ctr"/>
+          </a:p>
+        </p:txBody>
+      </p:sp>
+      <p:sp>
+        <p:nvSpPr>
+          <p:cNvPr id="12" name="TextBox 11"/>
+          <p:cNvSpPr txBox="1"/>
+          <p:nvPr/>
+        </p:nvSpPr>
+        <p:spPr>
+          <a:xfrm>
+            <a:off x="914400" y="5193792"/>
+            <a:ext cx="6949440" cy="914400"/>
+          </a:xfrm>
+          <a:prstGeom prst="rect">
+            <a:avLst/>
+          </a:prstGeom>
+          <a:noFill/>
+        </p:spPr>
+        <p:txBody>
+          <a:bodyPr wrap="square" lIns="0" rIns="0" tIns="0" bIns="0">
+            <a:spAutoFit/>
+          </a:bodyPr>
+          <a:lstStyle/>
+          <a:p>
+            <a:pPr>
+              <a:lnSpc>
+                <a:spcPct val="100000"/>
+              </a:lnSpc>
+              <a:spcBef>
+                <a:spcPts val="0"/>
+              </a:spcBef>
+              <a:spcAft>
+                <a:spcPts val="300"/>
+              </a:spcAft>
+            </a:pPr>
+            <a:r>
+              <a:rPr sz="2300" b="1" i="0">
+                <a:solidFill>
+                  <a:srgbClr val="FFFFFF"/>
+                </a:solidFill>
+                <a:latin typeface="Noto Sans"/>
+              </a:rPr>
+              <a:t>BAGHIZ ASSHIDDIQIE ARASYA</a:t>
+            </a:r>
+          </a:p>
+          <a:p>
+            <a:pPr>
+              <a:lnSpc>
+                <a:spcPct val="100000"/>
+              </a:lnSpc>
+              <a:spcBef>
+                <a:spcPts val="0"/>
+              </a:spcBef>
+              <a:spcAft>
+                <a:spcPts val="0"/>
+              </a:spcAft>
+            </a:pPr>
+            <a:r>
+              <a:rPr sz="1350" b="0" i="0">
+                <a:solidFill>
+                  <a:srgbClr val="EF7D1A"/>
+                </a:solidFill>
+                <a:latin typeface="Noto Sans"/>
+              </a:rPr>
+              <a:t>github.com/baghizash/harga-pangan-nasional-2026</a:t>
+            </a:r>
+          </a:p>
+        </p:txBody>
+      </p:sp>
+      <p:sp>
+        <p:nvSpPr>
+          <p:cNvPr id="13" name="TextBox 12"/>
+          <p:cNvSpPr txBox="1"/>
+          <p:nvPr/>
+        </p:nvSpPr>
+        <p:spPr>
+          <a:xfrm>
+            <a:off x="8138160" y="5321808"/>
+            <a:ext cx="3154680" cy="777240"/>
+          </a:xfrm>
+          <a:prstGeom prst="rect">
+            <a:avLst/>
+          </a:prstGeom>
+          <a:noFill/>
+        </p:spPr>
+        <p:txBody>
+          <a:bodyPr wrap="square" lIns="0" rIns="0" tIns="0" bIns="0">
+            <a:spAutoFit/>
+          </a:bodyPr>
+          <a:lstStyle/>
+          <a:p>
+            <a:pPr>
+              <a:lnSpc>
+                <a:spcPct val="120000"/>
+              </a:lnSpc>
+              <a:spcBef>
+                <a:spcPts val="0"/>
+              </a:spcBef>
+              <a:spcAft>
+                <a:spcPts val="0"/>
+              </a:spcAft>
+            </a:pPr>
+            <a:r>
+              <a:rPr sz="1250" b="0" i="0">
+                <a:solidFill>
+                  <a:srgbClr val="F8F2E4"/>
+                </a:solidFill>
+                <a:latin typeface="Noto Sans"/>
+              </a:rPr>
+              <a:t>Terima kasih. Silakan jelajahi repo dan dashboardnya, semua angka terbuka untuk dicek ulang.</a:t>
             </a:r>
           </a:p>
         </p:txBody>
@@ -3492,7 +4275,7 @@
     <p:bg>
       <p:bgPr>
         <a:solidFill>
-          <a:srgbClr val="FFFFFF"/>
+          <a:srgbClr val="F0E8D8"/>
         </a:solidFill>
         <a:effectLst/>
       </p:bgPr>
@@ -3512,8 +4295,8 @@
         </p:nvSpPr>
         <p:spPr>
           <a:xfrm>
-            <a:off x="640080" y="274320"/>
-            <a:ext cx="10881360" cy="822960"/>
+            <a:off x="502920" y="384048"/>
+            <a:ext cx="11155680" cy="914400"/>
           </a:xfrm>
           <a:prstGeom prst="rect">
             <a:avLst/>
@@ -3521,21 +4304,28 @@
           <a:noFill/>
         </p:spPr>
         <p:txBody>
-          <a:bodyPr wrap="square">
+          <a:bodyPr wrap="square" lIns="0" rIns="0" tIns="0" bIns="0">
             <a:spAutoFit/>
           </a:bodyPr>
           <a:lstStyle/>
           <a:p>
             <a:pPr>
+              <a:lnSpc>
+                <a:spcPct val="100000"/>
+              </a:lnSpc>
+              <a:spcBef>
+                <a:spcPts val="0"/>
+              </a:spcBef>
               <a:spcAft>
-                <a:spcPts val="800"/>
+                <a:spcPts val="0"/>
               </a:spcAft>
             </a:pPr>
             <a:r>
-              <a:rPr sz="3000" b="1" i="0">
-                <a:solidFill>
-                  <a:srgbClr val="1E3A8A"/>
-                </a:solidFill>
+              <a:rPr sz="3100" b="1" i="0">
+                <a:solidFill>
+                  <a:srgbClr val="2A1E33"/>
+                </a:solidFill>
+                <a:latin typeface="Noto Sans"/>
               </a:rPr>
               <a:t>Kenapa Harga Pangan?</a:t>
             </a:r>
@@ -3544,24 +4334,27 @@
       </p:sp>
       <p:sp>
         <p:nvSpPr>
-          <p:cNvPr id="3" name="Rectangle 2"/>
+          <p:cNvPr id="3" name="Rounded Rectangle 2"/>
           <p:cNvSpPr/>
           <p:nvPr/>
         </p:nvSpPr>
         <p:spPr>
           <a:xfrm>
-            <a:off x="640080" y="1051560"/>
-            <a:ext cx="1371600" cy="54864"/>
-          </a:xfrm>
-          <a:prstGeom prst="rect">
-            <a:avLst/>
+            <a:off x="521208" y="1097280"/>
+            <a:ext cx="777240" cy="82296"/>
+          </a:xfrm>
+          <a:prstGeom prst="roundRect">
+            <a:avLst>
+              <a:gd name="adj" fmla="val 50000"/>
+            </a:avLst>
           </a:prstGeom>
           <a:solidFill>
-            <a:srgbClr val="0E7C7B"/>
+            <a:srgbClr val="EF7D1A"/>
           </a:solidFill>
           <a:ln>
             <a:noFill/>
           </a:ln>
+          <a:effectLst/>
         </p:spPr>
         <p:style>
           <a:lnRef idx="1">
@@ -3587,14 +4380,106 @@
       </p:sp>
       <p:sp>
         <p:nvSpPr>
-          <p:cNvPr id="4" name="TextBox 3"/>
+          <p:cNvPr id="4" name="Rounded Rectangle 3"/>
+          <p:cNvSpPr/>
+          <p:nvPr/>
+        </p:nvSpPr>
+        <p:spPr>
+          <a:xfrm>
+            <a:off x="502920" y="1417320"/>
+            <a:ext cx="6903720" cy="4206240"/>
+          </a:xfrm>
+          <a:prstGeom prst="roundRect">
+            <a:avLst>
+              <a:gd name="adj" fmla="val 5434"/>
+            </a:avLst>
+          </a:prstGeom>
+          <a:solidFill>
+            <a:srgbClr val="DDCFB4"/>
+          </a:solidFill>
+          <a:ln>
+            <a:noFill/>
+          </a:ln>
+          <a:effectLst/>
+        </p:spPr>
+        <p:style>
+          <a:lnRef idx="1">
+            <a:schemeClr val="accent1"/>
+          </a:lnRef>
+          <a:fillRef idx="3">
+            <a:schemeClr val="accent1"/>
+          </a:fillRef>
+          <a:effectRef idx="2">
+            <a:schemeClr val="accent1"/>
+          </a:effectRef>
+          <a:fontRef idx="minor">
+            <a:schemeClr val="lt1"/>
+          </a:fontRef>
+        </p:style>
+        <p:txBody>
+          <a:bodyPr rtlCol="0" anchor="ctr"/>
+          <a:lstStyle/>
+          <a:p>
+            <a:pPr algn="ctr"/>
+          </a:p>
+        </p:txBody>
+      </p:sp>
+      <p:sp>
+        <p:nvSpPr>
+          <p:cNvPr id="5" name="Rounded Rectangle 4"/>
+          <p:cNvSpPr/>
+          <p:nvPr/>
+        </p:nvSpPr>
+        <p:spPr>
+          <a:xfrm>
+            <a:off x="566928" y="1481328"/>
+            <a:ext cx="6775704" cy="4078224"/>
+          </a:xfrm>
+          <a:prstGeom prst="roundRect">
+            <a:avLst>
+              <a:gd name="adj" fmla="val 4035"/>
+            </a:avLst>
+          </a:prstGeom>
+          <a:solidFill>
+            <a:srgbClr val="F8F2E4"/>
+          </a:solidFill>
+          <a:ln>
+            <a:noFill/>
+          </a:ln>
+          <a:effectLst/>
+        </p:spPr>
+        <p:style>
+          <a:lnRef idx="1">
+            <a:schemeClr val="accent1"/>
+          </a:lnRef>
+          <a:fillRef idx="3">
+            <a:schemeClr val="accent1"/>
+          </a:fillRef>
+          <a:effectRef idx="2">
+            <a:schemeClr val="accent1"/>
+          </a:effectRef>
+          <a:fontRef idx="minor">
+            <a:schemeClr val="lt1"/>
+          </a:fontRef>
+        </p:style>
+        <p:txBody>
+          <a:bodyPr rtlCol="0" anchor="ctr"/>
+          <a:lstStyle/>
+          <a:p>
+            <a:pPr algn="ctr"/>
+          </a:p>
+        </p:txBody>
+      </p:sp>
+      <p:sp>
+        <p:nvSpPr>
+          <p:cNvPr id="6" name="TextBox 5"/>
           <p:cNvSpPr txBox="1"/>
           <p:nvPr/>
         </p:nvSpPr>
         <p:spPr>
           <a:xfrm>
-            <a:off x="640080" y="1371600"/>
-            <a:ext cx="10881360" cy="4754880"/>
+            <a:off x="868680" y="1783080"/>
+            <a:ext cx="6217920" cy="3566160"/>
           </a:xfrm>
           <a:prstGeom prst="rect">
             <a:avLst/>
@@ -3602,82 +4487,134 @@
           <a:noFill/>
         </p:spPr>
         <p:txBody>
-          <a:bodyPr wrap="square">
+          <a:bodyPr wrap="square" lIns="0" rIns="0" tIns="0" bIns="0">
             <a:spAutoFit/>
           </a:bodyPr>
           <a:lstStyle/>
           <a:p>
-            <a:pPr marL="171450" indent="-171450">
+            <a:pPr marL="190500" indent="-190500">
+              <a:lnSpc>
+                <a:spcPct val="112000"/>
+              </a:lnSpc>
               <a:spcBef>
-                <a:spcPts val="200"/>
+                <a:spcPts val="0"/>
               </a:spcBef>
               <a:spcAft>
-                <a:spcPts val="1000"/>
+                <a:spcPts val="1300"/>
               </a:spcAft>
               <a:buChar char="•"/>
             </a:pPr>
             <a:r>
-              <a:rPr sz="1700" b="0" i="0">
-                <a:solidFill>
-                  <a:srgbClr val="1F2937"/>
-                </a:solidFill>
+              <a:rPr sz="1550" b="0" i="0">
+                <a:solidFill>
+                  <a:srgbClr val="2A1E33"/>
+                </a:solidFill>
+                <a:latin typeface="Noto Sans"/>
+              </a:rPr>
+              <a:t/>
+            </a:r>
+            <a:r>
+              <a:rPr sz="1550">
+                <a:solidFill>
+                  <a:srgbClr val="2A1E33"/>
+                </a:solidFill>
+                <a:latin typeface="Noto Sans"/>
               </a:rPr>
               <a:t>Beras, daging sapi, minyak goreng, dan gula pasir adalah bahan pokok yang harganya langsung menentukan daya beli jutaan rumah tangga Indonesia.</a:t>
             </a:r>
           </a:p>
           <a:p>
-            <a:pPr marL="171450" indent="-171450">
+            <a:pPr marL="190500" indent="-190500">
+              <a:lnSpc>
+                <a:spcPct val="112000"/>
+              </a:lnSpc>
               <a:spcBef>
-                <a:spcPts val="200"/>
+                <a:spcPts val="0"/>
               </a:spcBef>
               <a:spcAft>
-                <a:spcPts val="1000"/>
+                <a:spcPts val="1300"/>
               </a:spcAft>
               <a:buChar char="•"/>
             </a:pPr>
             <a:r>
-              <a:rPr sz="1700" b="0" i="0">
-                <a:solidFill>
-                  <a:srgbClr val="1F2937"/>
-                </a:solidFill>
-              </a:rPr>
-              <a:t>Ketika harga pangan naik 5–7% dalam setahun, yang paling terpukul adalah keluarga berpendapatan rendah — porsi belanja pangannya paling besar.</a:t>
-            </a:r>
-          </a:p>
-          <a:p>
-            <a:pPr marL="171450" indent="-171450">
+              <a:rPr sz="1550" b="0" i="0">
+                <a:solidFill>
+                  <a:srgbClr val="2A1E33"/>
+                </a:solidFill>
+                <a:latin typeface="Noto Sans"/>
+              </a:rPr>
+              <a:t/>
+            </a:r>
+            <a:r>
+              <a:rPr sz="1550">
+                <a:solidFill>
+                  <a:srgbClr val="2A1E33"/>
+                </a:solidFill>
+                <a:latin typeface="Noto Sans"/>
+              </a:rPr>
+              <a:t>Ketika harga pangan naik 5-7% dalam setahun, yang paling terpukul adalah keluarga berpendapatan rendah, porsi belanja pangannya paling besar.</a:t>
+            </a:r>
+          </a:p>
+          <a:p>
+            <a:pPr marL="190500" indent="-190500">
+              <a:lnSpc>
+                <a:spcPct val="112000"/>
+              </a:lnSpc>
               <a:spcBef>
-                <a:spcPts val="200"/>
+                <a:spcPts val="0"/>
               </a:spcBef>
               <a:spcAft>
-                <a:spcPts val="1000"/>
+                <a:spcPts val="1300"/>
               </a:spcAft>
               <a:buChar char="•"/>
             </a:pPr>
             <a:r>
-              <a:rPr sz="1700" b="0" i="0">
-                <a:solidFill>
-                  <a:srgbClr val="1F2937"/>
-                </a:solidFill>
+              <a:rPr sz="1550" b="0" i="0">
+                <a:solidFill>
+                  <a:srgbClr val="2A1E33"/>
+                </a:solidFill>
+                <a:latin typeface="Noto Sans"/>
+              </a:rPr>
+              <a:t/>
+            </a:r>
+            <a:r>
+              <a:rPr sz="1550">
+                <a:solidFill>
+                  <a:srgbClr val="2A1E33"/>
+                </a:solidFill>
+                <a:latin typeface="Noto Sans"/>
               </a:rPr>
               <a:t>Analisis ini menjawab: kelompok mana yang naik paling tinggi di 2026, komoditas mana yang paling tidak stabil, di provinsi mana harganya paling mahal, dan apakah Ramadan benar-benar mendongkrak harga.</a:t>
             </a:r>
           </a:p>
           <a:p>
-            <a:pPr marL="171450" indent="-171450">
+            <a:pPr marL="190500" indent="-190500">
+              <a:lnSpc>
+                <a:spcPct val="112000"/>
+              </a:lnSpc>
               <a:spcBef>
-                <a:spcPts val="200"/>
+                <a:spcPts val="0"/>
               </a:spcBef>
               <a:spcAft>
-                <a:spcPts val="1000"/>
+                <a:spcPts val="1300"/>
               </a:spcAft>
               <a:buChar char="•"/>
             </a:pPr>
             <a:r>
-              <a:rPr sz="1700" b="0" i="0">
-                <a:solidFill>
-                  <a:srgbClr val="1F2937"/>
-                </a:solidFill>
+              <a:rPr sz="1550" b="0" i="0">
+                <a:solidFill>
+                  <a:srgbClr val="2A1E33"/>
+                </a:solidFill>
+                <a:latin typeface="Noto Sans"/>
+              </a:rPr>
+              <a:t/>
+            </a:r>
+            <a:r>
+              <a:rPr sz="1550">
+                <a:solidFill>
+                  <a:srgbClr val="2A1E33"/>
+                </a:solidFill>
+                <a:latin typeface="Noto Sans"/>
               </a:rPr>
               <a:t>Semua jawaban diambil dari data harian resmi PIHPS/BI, bukan perkiraan.</a:t>
             </a:r>
@@ -3686,14 +4623,60 @@
       </p:sp>
       <p:sp>
         <p:nvSpPr>
-          <p:cNvPr id="5" name="TextBox 4"/>
+          <p:cNvPr id="7" name="Rounded Rectangle 6"/>
+          <p:cNvSpPr/>
+          <p:nvPr/>
+        </p:nvSpPr>
+        <p:spPr>
+          <a:xfrm>
+            <a:off x="7726679" y="1417320"/>
+            <a:ext cx="3959352" cy="1207008"/>
+          </a:xfrm>
+          <a:prstGeom prst="roundRect">
+            <a:avLst>
+              <a:gd name="adj" fmla="val 12121"/>
+            </a:avLst>
+          </a:prstGeom>
+          <a:solidFill>
+            <a:srgbClr val="F8F2E4"/>
+          </a:solidFill>
+          <a:ln>
+            <a:noFill/>
+          </a:ln>
+          <a:effectLst/>
+        </p:spPr>
+        <p:style>
+          <a:lnRef idx="1">
+            <a:schemeClr val="accent1"/>
+          </a:lnRef>
+          <a:fillRef idx="3">
+            <a:schemeClr val="accent1"/>
+          </a:fillRef>
+          <a:effectRef idx="2">
+            <a:schemeClr val="accent1"/>
+          </a:effectRef>
+          <a:fontRef idx="minor">
+            <a:schemeClr val="lt1"/>
+          </a:fontRef>
+        </p:style>
+        <p:txBody>
+          <a:bodyPr rtlCol="0" anchor="ctr"/>
+          <a:lstStyle/>
+          <a:p>
+            <a:pPr algn="ctr"/>
+          </a:p>
+        </p:txBody>
+      </p:sp>
+      <p:sp>
+        <p:nvSpPr>
+          <p:cNvPr id="8" name="TextBox 7"/>
           <p:cNvSpPr txBox="1"/>
           <p:nvPr/>
         </p:nvSpPr>
         <p:spPr>
           <a:xfrm>
-            <a:off x="640080" y="6126480"/>
-            <a:ext cx="10881360" cy="457200"/>
+            <a:off x="8046720" y="1581912"/>
+            <a:ext cx="3383280" cy="1737360"/>
           </a:xfrm>
           <a:prstGeom prst="rect">
             <a:avLst/>
@@ -3701,21 +4684,321 @@
           <a:noFill/>
         </p:spPr>
         <p:txBody>
-          <a:bodyPr wrap="square">
+          <a:bodyPr wrap="square" lIns="0" rIns="0" tIns="0" bIns="0">
             <a:spAutoFit/>
           </a:bodyPr>
           <a:lstStyle/>
           <a:p>
             <a:pPr>
+              <a:lnSpc>
+                <a:spcPct val="100000"/>
+              </a:lnSpc>
+              <a:spcBef>
+                <a:spcPts val="0"/>
+              </a:spcBef>
               <a:spcAft>
-                <a:spcPts val="800"/>
+                <a:spcPts val="200"/>
               </a:spcAft>
             </a:pPr>
             <a:r>
-              <a:rPr sz="1100" b="0" i="1">
-                <a:solidFill>
-                  <a:srgbClr val="6B7280"/>
-                </a:solidFill>
+              <a:rPr sz="3400" b="1" i="0">
+                <a:solidFill>
+                  <a:srgbClr val="EF7D1A"/>
+                </a:solidFill>
+                <a:latin typeface="Noto Sans"/>
+              </a:rPr>
+              <a:t>13</a:t>
+            </a:r>
+          </a:p>
+          <a:p>
+            <a:pPr>
+              <a:lnSpc>
+                <a:spcPct val="110000"/>
+              </a:lnSpc>
+              <a:spcBef>
+                <a:spcPts val="0"/>
+              </a:spcBef>
+              <a:spcAft>
+                <a:spcPts val="0"/>
+              </a:spcAft>
+            </a:pPr>
+            <a:r>
+              <a:rPr sz="1300" b="0" i="0">
+                <a:solidFill>
+                  <a:srgbClr val="2A1E33"/>
+                </a:solidFill>
+                <a:latin typeface="Noto Sans"/>
+              </a:rPr>
+              <a:t>komoditas kebutuhan pokok dianalisis</a:t>
+            </a:r>
+          </a:p>
+        </p:txBody>
+      </p:sp>
+      <p:sp>
+        <p:nvSpPr>
+          <p:cNvPr id="9" name="Rounded Rectangle 8"/>
+          <p:cNvSpPr/>
+          <p:nvPr/>
+        </p:nvSpPr>
+        <p:spPr>
+          <a:xfrm>
+            <a:off x="7726679" y="2770632"/>
+            <a:ext cx="3959352" cy="1207008"/>
+          </a:xfrm>
+          <a:prstGeom prst="roundRect">
+            <a:avLst>
+              <a:gd name="adj" fmla="val 12121"/>
+            </a:avLst>
+          </a:prstGeom>
+          <a:solidFill>
+            <a:srgbClr val="F8F2E4"/>
+          </a:solidFill>
+          <a:ln>
+            <a:noFill/>
+          </a:ln>
+          <a:effectLst/>
+        </p:spPr>
+        <p:style>
+          <a:lnRef idx="1">
+            <a:schemeClr val="accent1"/>
+          </a:lnRef>
+          <a:fillRef idx="3">
+            <a:schemeClr val="accent1"/>
+          </a:fillRef>
+          <a:effectRef idx="2">
+            <a:schemeClr val="accent1"/>
+          </a:effectRef>
+          <a:fontRef idx="minor">
+            <a:schemeClr val="lt1"/>
+          </a:fontRef>
+        </p:style>
+        <p:txBody>
+          <a:bodyPr rtlCol="0" anchor="ctr"/>
+          <a:lstStyle/>
+          <a:p>
+            <a:pPr algn="ctr"/>
+          </a:p>
+        </p:txBody>
+      </p:sp>
+      <p:sp>
+        <p:nvSpPr>
+          <p:cNvPr id="10" name="TextBox 9"/>
+          <p:cNvSpPr txBox="1"/>
+          <p:nvPr/>
+        </p:nvSpPr>
+        <p:spPr>
+          <a:xfrm>
+            <a:off x="8046720" y="2935224"/>
+            <a:ext cx="3383280" cy="1737360"/>
+          </a:xfrm>
+          <a:prstGeom prst="rect">
+            <a:avLst/>
+          </a:prstGeom>
+          <a:noFill/>
+        </p:spPr>
+        <p:txBody>
+          <a:bodyPr wrap="square" lIns="0" rIns="0" tIns="0" bIns="0">
+            <a:spAutoFit/>
+          </a:bodyPr>
+          <a:lstStyle/>
+          <a:p>
+            <a:pPr>
+              <a:lnSpc>
+                <a:spcPct val="100000"/>
+              </a:lnSpc>
+              <a:spcBef>
+                <a:spcPts val="0"/>
+              </a:spcBef>
+              <a:spcAft>
+                <a:spcPts val="200"/>
+              </a:spcAft>
+            </a:pPr>
+            <a:r>
+              <a:rPr sz="3400" b="1" i="0">
+                <a:solidFill>
+                  <a:srgbClr val="EF7D1A"/>
+                </a:solidFill>
+                <a:latin typeface="Noto Sans"/>
+              </a:rPr>
+              <a:t>34</a:t>
+            </a:r>
+          </a:p>
+          <a:p>
+            <a:pPr>
+              <a:lnSpc>
+                <a:spcPct val="110000"/>
+              </a:lnSpc>
+              <a:spcBef>
+                <a:spcPts val="0"/>
+              </a:spcBef>
+              <a:spcAft>
+                <a:spcPts val="0"/>
+              </a:spcAft>
+            </a:pPr>
+            <a:r>
+              <a:rPr sz="1300" b="0" i="0">
+                <a:solidFill>
+                  <a:srgbClr val="2A1E33"/>
+                </a:solidFill>
+                <a:latin typeface="Noto Sans"/>
+              </a:rPr>
+              <a:t>provinsi dibandingkan harganya</a:t>
+            </a:r>
+          </a:p>
+        </p:txBody>
+      </p:sp>
+      <p:sp>
+        <p:nvSpPr>
+          <p:cNvPr id="11" name="Rounded Rectangle 10"/>
+          <p:cNvSpPr/>
+          <p:nvPr/>
+        </p:nvSpPr>
+        <p:spPr>
+          <a:xfrm>
+            <a:off x="7726679" y="4123944"/>
+            <a:ext cx="3959352" cy="1499616"/>
+          </a:xfrm>
+          <a:prstGeom prst="roundRect">
+            <a:avLst>
+              <a:gd name="adj" fmla="val 9756"/>
+            </a:avLst>
+          </a:prstGeom>
+          <a:solidFill>
+            <a:srgbClr val="5E2A72"/>
+          </a:solidFill>
+          <a:ln>
+            <a:noFill/>
+          </a:ln>
+          <a:effectLst/>
+        </p:spPr>
+        <p:style>
+          <a:lnRef idx="1">
+            <a:schemeClr val="accent1"/>
+          </a:lnRef>
+          <a:fillRef idx="3">
+            <a:schemeClr val="accent1"/>
+          </a:fillRef>
+          <a:effectRef idx="2">
+            <a:schemeClr val="accent1"/>
+          </a:effectRef>
+          <a:fontRef idx="minor">
+            <a:schemeClr val="lt1"/>
+          </a:fontRef>
+        </p:style>
+        <p:txBody>
+          <a:bodyPr rtlCol="0" anchor="ctr"/>
+          <a:lstStyle/>
+          <a:p>
+            <a:pPr algn="ctr"/>
+          </a:p>
+        </p:txBody>
+      </p:sp>
+      <p:sp>
+        <p:nvSpPr>
+          <p:cNvPr id="12" name="TextBox 11"/>
+          <p:cNvSpPr txBox="1"/>
+          <p:nvPr/>
+        </p:nvSpPr>
+        <p:spPr>
+          <a:xfrm>
+            <a:off x="8046720" y="4306824"/>
+            <a:ext cx="3383280" cy="1737360"/>
+          </a:xfrm>
+          <a:prstGeom prst="rect">
+            <a:avLst/>
+          </a:prstGeom>
+          <a:noFill/>
+        </p:spPr>
+        <p:txBody>
+          <a:bodyPr wrap="square" lIns="0" rIns="0" tIns="0" bIns="0">
+            <a:spAutoFit/>
+          </a:bodyPr>
+          <a:lstStyle/>
+          <a:p>
+            <a:pPr>
+              <a:lnSpc>
+                <a:spcPct val="100000"/>
+              </a:lnSpc>
+              <a:spcBef>
+                <a:spcPts val="0"/>
+              </a:spcBef>
+              <a:spcAft>
+                <a:spcPts val="200"/>
+              </a:spcAft>
+            </a:pPr>
+            <a:r>
+              <a:rPr sz="3400" b="1" i="0">
+                <a:solidFill>
+                  <a:srgbClr val="EF7D1A"/>
+                </a:solidFill>
+                <a:latin typeface="Noto Sans"/>
+              </a:rPr>
+              <a:t>5-7%</a:t>
+            </a:r>
+          </a:p>
+          <a:p>
+            <a:pPr>
+              <a:lnSpc>
+                <a:spcPct val="110000"/>
+              </a:lnSpc>
+              <a:spcBef>
+                <a:spcPts val="0"/>
+              </a:spcBef>
+              <a:spcAft>
+                <a:spcPts val="0"/>
+              </a:spcAft>
+            </a:pPr>
+            <a:r>
+              <a:rPr sz="1300" b="0" i="0">
+                <a:solidFill>
+                  <a:srgbClr val="F8F2E4"/>
+                </a:solidFill>
+                <a:latin typeface="Noto Sans"/>
+              </a:rPr>
+              <a:t>kenaikan harga pangan dalam setahun yang paling terasa bagi keluarga berpendapatan rendah</a:t>
+            </a:r>
+          </a:p>
+        </p:txBody>
+      </p:sp>
+      <p:sp>
+        <p:nvSpPr>
+          <p:cNvPr id="13" name="TextBox 12"/>
+          <p:cNvSpPr txBox="1"/>
+          <p:nvPr/>
+        </p:nvSpPr>
+        <p:spPr>
+          <a:xfrm>
+            <a:off x="502920" y="5870448"/>
+            <a:ext cx="11155680" cy="411480"/>
+          </a:xfrm>
+          <a:prstGeom prst="rect">
+            <a:avLst/>
+          </a:prstGeom>
+          <a:noFill/>
+        </p:spPr>
+        <p:txBody>
+          <a:bodyPr wrap="square" lIns="0" rIns="0" tIns="0" bIns="0">
+            <a:spAutoFit/>
+          </a:bodyPr>
+          <a:lstStyle/>
+          <a:p>
+            <a:pPr>
+              <a:lnSpc>
+                <a:spcPct val="100000"/>
+              </a:lnSpc>
+              <a:spcBef>
+                <a:spcPts val="0"/>
+              </a:spcBef>
+              <a:spcAft>
+                <a:spcPts val="0"/>
+              </a:spcAft>
+            </a:pPr>
+            <a:r>
+              <a:rPr sz="1150" b="0" i="1">
+                <a:solidFill>
+                  <a:srgbClr val="8A5CA6"/>
+                </a:solidFill>
+                <a:latin typeface="Noto Sans"/>
               </a:rPr>
               <a:t>Sumber data: API publik PIHPS / Bank Indonesia (bi.go.id/hargapangan), Pasar Tradisional.</a:t>
             </a:r>
@@ -3736,7 +5019,7 @@
     <p:bg>
       <p:bgPr>
         <a:solidFill>
-          <a:srgbClr val="FFFFFF"/>
+          <a:srgbClr val="F0E8D8"/>
         </a:solidFill>
         <a:effectLst/>
       </p:bgPr>
@@ -3756,8 +5039,8 @@
         </p:nvSpPr>
         <p:spPr>
           <a:xfrm>
-            <a:off x="640080" y="274320"/>
-            <a:ext cx="10881360" cy="822960"/>
+            <a:off x="502920" y="384048"/>
+            <a:ext cx="11155680" cy="914400"/>
           </a:xfrm>
           <a:prstGeom prst="rect">
             <a:avLst/>
@@ -3765,21 +5048,28 @@
           <a:noFill/>
         </p:spPr>
         <p:txBody>
-          <a:bodyPr wrap="square">
+          <a:bodyPr wrap="square" lIns="0" rIns="0" tIns="0" bIns="0">
             <a:spAutoFit/>
           </a:bodyPr>
           <a:lstStyle/>
           <a:p>
             <a:pPr>
+              <a:lnSpc>
+                <a:spcPct val="100000"/>
+              </a:lnSpc>
+              <a:spcBef>
+                <a:spcPts val="0"/>
+              </a:spcBef>
               <a:spcAft>
-                <a:spcPts val="800"/>
+                <a:spcPts val="0"/>
               </a:spcAft>
             </a:pPr>
             <a:r>
-              <a:rPr sz="3000" b="1" i="0">
-                <a:solidFill>
-                  <a:srgbClr val="1E3A8A"/>
-                </a:solidFill>
+              <a:rPr sz="3100" b="1" i="0">
+                <a:solidFill>
+                  <a:srgbClr val="2A1E33"/>
+                </a:solidFill>
+                <a:latin typeface="Noto Sans"/>
               </a:rPr>
               <a:t>Data dan Metode</a:t>
             </a:r>
@@ -3788,24 +5078,27 @@
       </p:sp>
       <p:sp>
         <p:nvSpPr>
-          <p:cNvPr id="3" name="Rectangle 2"/>
+          <p:cNvPr id="3" name="Rounded Rectangle 2"/>
           <p:cNvSpPr/>
           <p:nvPr/>
         </p:nvSpPr>
         <p:spPr>
           <a:xfrm>
-            <a:off x="640080" y="1051560"/>
-            <a:ext cx="1371600" cy="54864"/>
-          </a:xfrm>
-          <a:prstGeom prst="rect">
-            <a:avLst/>
+            <a:off x="521208" y="1097280"/>
+            <a:ext cx="777240" cy="82296"/>
+          </a:xfrm>
+          <a:prstGeom prst="roundRect">
+            <a:avLst>
+              <a:gd name="adj" fmla="val 50000"/>
+            </a:avLst>
           </a:prstGeom>
           <a:solidFill>
-            <a:srgbClr val="0E7C7B"/>
+            <a:srgbClr val="EF7D1A"/>
           </a:solidFill>
           <a:ln>
             <a:noFill/>
           </a:ln>
+          <a:effectLst/>
         </p:spPr>
         <p:style>
           <a:lnRef idx="1">
@@ -3831,14 +5124,60 @@
       </p:sp>
       <p:sp>
         <p:nvSpPr>
-          <p:cNvPr id="4" name="TextBox 3"/>
+          <p:cNvPr id="4" name="Rounded Rectangle 3"/>
+          <p:cNvSpPr/>
+          <p:nvPr/>
+        </p:nvSpPr>
+        <p:spPr>
+          <a:xfrm>
+            <a:off x="502920" y="1417320"/>
+            <a:ext cx="3291840" cy="2011680"/>
+          </a:xfrm>
+          <a:prstGeom prst="roundRect">
+            <a:avLst>
+              <a:gd name="adj" fmla="val 7272"/>
+            </a:avLst>
+          </a:prstGeom>
+          <a:solidFill>
+            <a:srgbClr val="5E2A72"/>
+          </a:solidFill>
+          <a:ln>
+            <a:noFill/>
+          </a:ln>
+          <a:effectLst/>
+        </p:spPr>
+        <p:style>
+          <a:lnRef idx="1">
+            <a:schemeClr val="accent1"/>
+          </a:lnRef>
+          <a:fillRef idx="3">
+            <a:schemeClr val="accent1"/>
+          </a:fillRef>
+          <a:effectRef idx="2">
+            <a:schemeClr val="accent1"/>
+          </a:effectRef>
+          <a:fontRef idx="minor">
+            <a:schemeClr val="lt1"/>
+          </a:fontRef>
+        </p:style>
+        <p:txBody>
+          <a:bodyPr rtlCol="0" anchor="ctr"/>
+          <a:lstStyle/>
+          <a:p>
+            <a:pPr algn="ctr"/>
+          </a:p>
+        </p:txBody>
+      </p:sp>
+      <p:sp>
+        <p:nvSpPr>
+          <p:cNvPr id="5" name="TextBox 4"/>
           <p:cNvSpPr txBox="1"/>
           <p:nvPr/>
         </p:nvSpPr>
         <p:spPr>
           <a:xfrm>
-            <a:off x="640080" y="1371600"/>
-            <a:ext cx="10881360" cy="4754880"/>
+            <a:off x="822960" y="1664208"/>
+            <a:ext cx="2697480" cy="1737360"/>
           </a:xfrm>
           <a:prstGeom prst="rect">
             <a:avLst/>
@@ -3846,84 +5185,408 @@
           <a:noFill/>
         </p:spPr>
         <p:txBody>
-          <a:bodyPr wrap="square">
+          <a:bodyPr wrap="square" lIns="0" rIns="0" tIns="0" bIns="0">
             <a:spAutoFit/>
           </a:bodyPr>
           <a:lstStyle/>
           <a:p>
-            <a:pPr marL="171450" indent="-171450">
+            <a:pPr>
+              <a:lnSpc>
+                <a:spcPct val="100000"/>
+              </a:lnSpc>
               <a:spcBef>
-                <a:spcPts val="200"/>
+                <a:spcPts val="0"/>
               </a:spcBef>
               <a:spcAft>
-                <a:spcPts val="1000"/>
+                <a:spcPts val="200"/>
+              </a:spcAft>
+            </a:pPr>
+            <a:r>
+              <a:rPr sz="3000" b="1" i="0">
+                <a:solidFill>
+                  <a:srgbClr val="EF7D1A"/>
+                </a:solidFill>
+                <a:latin typeface="Noto Sans"/>
+              </a:rPr>
+              <a:t>203.077</a:t>
+            </a:r>
+          </a:p>
+          <a:p>
+            <a:pPr>
+              <a:lnSpc>
+                <a:spcPct val="110000"/>
+              </a:lnSpc>
+              <a:spcBef>
+                <a:spcPts val="0"/>
+              </a:spcBef>
+              <a:spcAft>
+                <a:spcPts val="0"/>
+              </a:spcAft>
+            </a:pPr>
+            <a:r>
+              <a:rPr sz="1300" b="0" i="0">
+                <a:solidFill>
+                  <a:srgbClr val="F8F2E4"/>
+                </a:solidFill>
+                <a:latin typeface="Noto Sans"/>
+              </a:rPr>
+              <a:t>baris data provinsi dari API PIHPS</a:t>
+            </a:r>
+          </a:p>
+        </p:txBody>
+      </p:sp>
+      <p:sp>
+        <p:nvSpPr>
+          <p:cNvPr id="6" name="Rounded Rectangle 5"/>
+          <p:cNvSpPr/>
+          <p:nvPr/>
+        </p:nvSpPr>
+        <p:spPr>
+          <a:xfrm>
+            <a:off x="502920" y="3611880"/>
+            <a:ext cx="3291840" cy="2011680"/>
+          </a:xfrm>
+          <a:prstGeom prst="roundRect">
+            <a:avLst>
+              <a:gd name="adj" fmla="val 7272"/>
+            </a:avLst>
+          </a:prstGeom>
+          <a:solidFill>
+            <a:srgbClr val="F8F2E4"/>
+          </a:solidFill>
+          <a:ln>
+            <a:noFill/>
+          </a:ln>
+          <a:effectLst/>
+        </p:spPr>
+        <p:style>
+          <a:lnRef idx="1">
+            <a:schemeClr val="accent1"/>
+          </a:lnRef>
+          <a:fillRef idx="3">
+            <a:schemeClr val="accent1"/>
+          </a:fillRef>
+          <a:effectRef idx="2">
+            <a:schemeClr val="accent1"/>
+          </a:effectRef>
+          <a:fontRef idx="minor">
+            <a:schemeClr val="lt1"/>
+          </a:fontRef>
+        </p:style>
+        <p:txBody>
+          <a:bodyPr rtlCol="0" anchor="ctr"/>
+          <a:lstStyle/>
+          <a:p>
+            <a:pPr algn="ctr"/>
+          </a:p>
+        </p:txBody>
+      </p:sp>
+      <p:sp>
+        <p:nvSpPr>
+          <p:cNvPr id="7" name="TextBox 6"/>
+          <p:cNvSpPr txBox="1"/>
+          <p:nvPr/>
+        </p:nvSpPr>
+        <p:spPr>
+          <a:xfrm>
+            <a:off x="822960" y="3858768"/>
+            <a:ext cx="2697480" cy="1737360"/>
+          </a:xfrm>
+          <a:prstGeom prst="rect">
+            <a:avLst/>
+          </a:prstGeom>
+          <a:noFill/>
+        </p:spPr>
+        <p:txBody>
+          <a:bodyPr wrap="square" lIns="0" rIns="0" tIns="0" bIns="0">
+            <a:spAutoFit/>
+          </a:bodyPr>
+          <a:lstStyle/>
+          <a:p>
+            <a:pPr>
+              <a:lnSpc>
+                <a:spcPct val="100000"/>
+              </a:lnSpc>
+              <a:spcBef>
+                <a:spcPts val="0"/>
+              </a:spcBef>
+              <a:spcAft>
+                <a:spcPts val="200"/>
+              </a:spcAft>
+            </a:pPr>
+            <a:r>
+              <a:rPr sz="3000" b="1" i="0">
+                <a:solidFill>
+                  <a:srgbClr val="EF7D1A"/>
+                </a:solidFill>
+                <a:latin typeface="Noto Sans"/>
+              </a:rPr>
+              <a:t>6.097</a:t>
+            </a:r>
+          </a:p>
+          <a:p>
+            <a:pPr>
+              <a:lnSpc>
+                <a:spcPct val="110000"/>
+              </a:lnSpc>
+              <a:spcBef>
+                <a:spcPts val="0"/>
+              </a:spcBef>
+              <a:spcAft>
+                <a:spcPts val="0"/>
+              </a:spcAft>
+            </a:pPr>
+            <a:r>
+              <a:rPr sz="1300" b="0" i="0">
+                <a:solidFill>
+                  <a:srgbClr val="2A1E33"/>
+                </a:solidFill>
+                <a:latin typeface="Noto Sans"/>
+              </a:rPr>
+              <a:t>baris data nasional, disimpan terpisah dari level provinsi</a:t>
+            </a:r>
+          </a:p>
+        </p:txBody>
+      </p:sp>
+      <p:sp>
+        <p:nvSpPr>
+          <p:cNvPr id="8" name="Rounded Rectangle 7"/>
+          <p:cNvSpPr/>
+          <p:nvPr/>
+        </p:nvSpPr>
+        <p:spPr>
+          <a:xfrm>
+            <a:off x="4114800" y="1417320"/>
+            <a:ext cx="7571231" cy="4206240"/>
+          </a:xfrm>
+          <a:prstGeom prst="roundRect">
+            <a:avLst>
+              <a:gd name="adj" fmla="val 5434"/>
+            </a:avLst>
+          </a:prstGeom>
+          <a:solidFill>
+            <a:srgbClr val="DDCFB4"/>
+          </a:solidFill>
+          <a:ln>
+            <a:noFill/>
+          </a:ln>
+          <a:effectLst/>
+        </p:spPr>
+        <p:style>
+          <a:lnRef idx="1">
+            <a:schemeClr val="accent1"/>
+          </a:lnRef>
+          <a:fillRef idx="3">
+            <a:schemeClr val="accent1"/>
+          </a:fillRef>
+          <a:effectRef idx="2">
+            <a:schemeClr val="accent1"/>
+          </a:effectRef>
+          <a:fontRef idx="minor">
+            <a:schemeClr val="lt1"/>
+          </a:fontRef>
+        </p:style>
+        <p:txBody>
+          <a:bodyPr rtlCol="0" anchor="ctr"/>
+          <a:lstStyle/>
+          <a:p>
+            <a:pPr algn="ctr"/>
+          </a:p>
+        </p:txBody>
+      </p:sp>
+      <p:sp>
+        <p:nvSpPr>
+          <p:cNvPr id="9" name="Rounded Rectangle 8"/>
+          <p:cNvSpPr/>
+          <p:nvPr/>
+        </p:nvSpPr>
+        <p:spPr>
+          <a:xfrm>
+            <a:off x="4178808" y="1481328"/>
+            <a:ext cx="7443215" cy="4078224"/>
+          </a:xfrm>
+          <a:prstGeom prst="roundRect">
+            <a:avLst>
+              <a:gd name="adj" fmla="val 4035"/>
+            </a:avLst>
+          </a:prstGeom>
+          <a:solidFill>
+            <a:srgbClr val="F8F2E4"/>
+          </a:solidFill>
+          <a:ln>
+            <a:noFill/>
+          </a:ln>
+          <a:effectLst/>
+        </p:spPr>
+        <p:style>
+          <a:lnRef idx="1">
+            <a:schemeClr val="accent1"/>
+          </a:lnRef>
+          <a:fillRef idx="3">
+            <a:schemeClr val="accent1"/>
+          </a:fillRef>
+          <a:effectRef idx="2">
+            <a:schemeClr val="accent1"/>
+          </a:effectRef>
+          <a:fontRef idx="minor">
+            <a:schemeClr val="lt1"/>
+          </a:fontRef>
+        </p:style>
+        <p:txBody>
+          <a:bodyPr rtlCol="0" anchor="ctr"/>
+          <a:lstStyle/>
+          <a:p>
+            <a:pPr algn="ctr"/>
+          </a:p>
+        </p:txBody>
+      </p:sp>
+      <p:sp>
+        <p:nvSpPr>
+          <p:cNvPr id="10" name="TextBox 9"/>
+          <p:cNvSpPr txBox="1"/>
+          <p:nvPr/>
+        </p:nvSpPr>
+        <p:spPr>
+          <a:xfrm>
+            <a:off x="4480560" y="1755648"/>
+            <a:ext cx="6858000" cy="3611880"/>
+          </a:xfrm>
+          <a:prstGeom prst="rect">
+            <a:avLst/>
+          </a:prstGeom>
+          <a:noFill/>
+        </p:spPr>
+        <p:txBody>
+          <a:bodyPr wrap="square" lIns="0" rIns="0" tIns="0" bIns="0">
+            <a:spAutoFit/>
+          </a:bodyPr>
+          <a:lstStyle/>
+          <a:p>
+            <a:pPr marL="190500" indent="-190500">
+              <a:lnSpc>
+                <a:spcPct val="112000"/>
+              </a:lnSpc>
+              <a:spcBef>
+                <a:spcPts val="0"/>
+              </a:spcBef>
+              <a:spcAft>
+                <a:spcPts val="1200"/>
               </a:spcAft>
               <a:buChar char="•"/>
             </a:pPr>
             <a:r>
-              <a:rPr sz="1700" b="0" i="0">
-                <a:solidFill>
-                  <a:srgbClr val="1F2937"/>
-                </a:solidFill>
-              </a:rPr>
-              <a:t>Data harian API PIHPS: 1 Jan 2025 – 19 Okt 2026 (469 hari laporan), 6.097 baris nasional + 203.077 baris provinsi.</a:t>
-            </a:r>
-          </a:p>
-          <a:p>
-            <a:pPr marL="171450" indent="-171450">
+              <a:rPr sz="1500" b="0" i="0">
+                <a:solidFill>
+                  <a:srgbClr val="2A1E33"/>
+                </a:solidFill>
+                <a:latin typeface="Noto Sans"/>
+              </a:rPr>
+              <a:t/>
+            </a:r>
+            <a:r>
+              <a:rPr sz="1500">
+                <a:solidFill>
+                  <a:srgbClr val="2A1E33"/>
+                </a:solidFill>
+                <a:latin typeface="Noto Sans"/>
+              </a:rPr>
+              <a:t>Data harian API PIHPS: 1 Jan 2025 - 19 Okt 2026 (469 hari laporan), 6.097 baris nasional + 203.077 baris provinsi.</a:t>
+            </a:r>
+          </a:p>
+          <a:p>
+            <a:pPr marL="190500" indent="-190500">
+              <a:lnSpc>
+                <a:spcPct val="112000"/>
+              </a:lnSpc>
               <a:spcBef>
-                <a:spcPts val="200"/>
+                <a:spcPts val="0"/>
               </a:spcBef>
               <a:spcAft>
-                <a:spcPts val="1000"/>
+                <a:spcPts val="1200"/>
               </a:spcAft>
               <a:buChar char="•"/>
             </a:pPr>
             <a:r>
-              <a:rPr sz="1700" b="0" i="0">
-                <a:solidFill>
-                  <a:srgbClr val="1F2937"/>
-                </a:solidFill>
-              </a:rPr>
-              <a:t>13 komoditas daun: 6 kualitas beras, 2 daging sapi, 3 minyak goreng, 2 gula pasir. API ini tidak menyediakan seri daun untuk telur/daging ayam/bawang — tidak dipakai, tidak dikarang.</a:t>
-            </a:r>
-          </a:p>
-          <a:p>
-            <a:pPr marL="171450" indent="-171450">
+              <a:rPr sz="1500" b="0" i="0">
+                <a:solidFill>
+                  <a:srgbClr val="2A1E33"/>
+                </a:solidFill>
+                <a:latin typeface="Noto Sans"/>
+              </a:rPr>
+              <a:t/>
+            </a:r>
+            <a:r>
+              <a:rPr sz="1500">
+                <a:solidFill>
+                  <a:srgbClr val="2A1E33"/>
+                </a:solidFill>
+                <a:latin typeface="Noto Sans"/>
+              </a:rPr>
+              <a:t>13 komoditas daun: 6 kualitas beras, 2 daging sapi, 3 minyak goreng, 2 gula pasir. API ini tidak menyediakan seri daun untuk telur/daging ayam/bawang, tidak dipakai, tidak dikarang.</a:t>
+            </a:r>
+          </a:p>
+          <a:p>
+            <a:pPr marL="190500" indent="-190500">
+              <a:lnSpc>
+                <a:spcPct val="112000"/>
+              </a:lnSpc>
               <a:spcBef>
-                <a:spcPts val="200"/>
+                <a:spcPts val="0"/>
               </a:spcBef>
               <a:spcAft>
-                <a:spcPts val="1000"/>
+                <a:spcPts val="1200"/>
               </a:spcAft>
               <a:buChar char="•"/>
             </a:pPr>
             <a:r>
-              <a:rPr sz="1700" b="0" i="0">
-                <a:solidFill>
-                  <a:srgbClr val="1F2937"/>
-                </a:solidFill>
-              </a:rPr>
-              <a:t>Level nasional dan provinsi disimpan di tabel fakta TERPISAH sejak awal (fact_nasional, fact_provinsi) — pelajaran dari proyek cabai — sehingga agregasi dan measure DAX selalu membaca satu grain tanpa guard khusus.</a:t>
-            </a:r>
-          </a:p>
-          <a:p>
-            <a:pPr marL="171450" indent="-171450">
+              <a:rPr sz="1500" b="0" i="0">
+                <a:solidFill>
+                  <a:srgbClr val="2A1E33"/>
+                </a:solidFill>
+                <a:latin typeface="Noto Sans"/>
+              </a:rPr>
+              <a:t/>
+            </a:r>
+            <a:r>
+              <a:rPr sz="1500">
+                <a:solidFill>
+                  <a:srgbClr val="2A1E33"/>
+                </a:solidFill>
+                <a:latin typeface="Noto Sans"/>
+              </a:rPr>
+              <a:t>Level nasional dan provinsi disimpan di tabel fakta TERPISAH sejak awal (fact_nasional, fact_provinsi), pelajaran dari proyek cabai, sehingga agregasi dan measure DAX selalu membaca satu grain tanpa guard khusus.</a:t>
+            </a:r>
+          </a:p>
+          <a:p>
+            <a:pPr marL="190500" indent="-190500">
+              <a:lnSpc>
+                <a:spcPct val="112000"/>
+              </a:lnSpc>
               <a:spcBef>
-                <a:spcPts val="200"/>
+                <a:spcPts val="0"/>
               </a:spcBef>
               <a:spcAft>
-                <a:spcPts val="1000"/>
+                <a:spcPts val="1200"/>
               </a:spcAft>
               <a:buChar char="•"/>
             </a:pPr>
             <a:r>
-              <a:rPr sz="1700" b="0" i="0">
-                <a:solidFill>
-                  <a:srgbClr val="1F2937"/>
-                </a:solidFill>
-              </a:rPr>
-              <a:t>9 kombinasi komoditas-provinsi tidak memiliki seri laporan (mis. beras di Gorontalo) — dicatat sebagai gap, tidak diisi angka lain.</a:t>
+              <a:rPr sz="1500" b="0" i="0">
+                <a:solidFill>
+                  <a:srgbClr val="2A1E33"/>
+                </a:solidFill>
+                <a:latin typeface="Noto Sans"/>
+              </a:rPr>
+              <a:t/>
+            </a:r>
+            <a:r>
+              <a:rPr sz="1500">
+                <a:solidFill>
+                  <a:srgbClr val="2A1E33"/>
+                </a:solidFill>
+                <a:latin typeface="Noto Sans"/>
+              </a:rPr>
+              <a:t>9 kombinasi komoditas-provinsi tidak memiliki seri laporan (mis. beras di Gorontalo), dicatat sebagai gap, tidak diisi angka lain.</a:t>
             </a:r>
           </a:p>
         </p:txBody>
@@ -3942,7 +5605,7 @@
     <p:bg>
       <p:bgPr>
         <a:solidFill>
-          <a:srgbClr val="FFFFFF"/>
+          <a:srgbClr val="F0E8D8"/>
         </a:solidFill>
         <a:effectLst/>
       </p:bgPr>
@@ -3962,8 +5625,8 @@
         </p:nvSpPr>
         <p:spPr>
           <a:xfrm>
-            <a:off x="640080" y="274320"/>
-            <a:ext cx="10881360" cy="822960"/>
+            <a:off x="502920" y="384048"/>
+            <a:ext cx="11155680" cy="914400"/>
           </a:xfrm>
           <a:prstGeom prst="rect">
             <a:avLst/>
@@ -3971,47 +5634,57 @@
           <a:noFill/>
         </p:spPr>
         <p:txBody>
-          <a:bodyPr wrap="square">
+          <a:bodyPr wrap="square" lIns="0" rIns="0" tIns="0" bIns="0">
             <a:spAutoFit/>
           </a:bodyPr>
           <a:lstStyle/>
           <a:p>
             <a:pPr>
+              <a:lnSpc>
+                <a:spcPct val="100000"/>
+              </a:lnSpc>
+              <a:spcBef>
+                <a:spcPts val="0"/>
+              </a:spcBef>
               <a:spcAft>
-                <a:spcPts val="800"/>
+                <a:spcPts val="0"/>
               </a:spcAft>
             </a:pPr>
             <a:r>
-              <a:rPr sz="3000" b="1" i="0">
-                <a:solidFill>
-                  <a:srgbClr val="1E3A8A"/>
-                </a:solidFill>
-              </a:rPr>
-              <a:t>Tren Nasional 2025–2026</a:t>
-            </a:r>
-          </a:p>
-        </p:txBody>
-      </p:sp>
-      <p:sp>
-        <p:nvSpPr>
-          <p:cNvPr id="3" name="Rectangle 2"/>
+              <a:rPr sz="3100" b="1" i="0">
+                <a:solidFill>
+                  <a:srgbClr val="2A1E33"/>
+                </a:solidFill>
+                <a:latin typeface="Noto Sans"/>
+              </a:rPr>
+              <a:t>Tren Nasional 2025-2026</a:t>
+            </a:r>
+          </a:p>
+        </p:txBody>
+      </p:sp>
+      <p:sp>
+        <p:nvSpPr>
+          <p:cNvPr id="3" name="Rounded Rectangle 2"/>
           <p:cNvSpPr/>
           <p:nvPr/>
         </p:nvSpPr>
         <p:spPr>
           <a:xfrm>
-            <a:off x="640080" y="1051560"/>
-            <a:ext cx="1371600" cy="54864"/>
-          </a:xfrm>
-          <a:prstGeom prst="rect">
-            <a:avLst/>
+            <a:off x="521208" y="1097280"/>
+            <a:ext cx="777240" cy="82296"/>
+          </a:xfrm>
+          <a:prstGeom prst="roundRect">
+            <a:avLst>
+              <a:gd name="adj" fmla="val 50000"/>
+            </a:avLst>
           </a:prstGeom>
           <a:solidFill>
-            <a:srgbClr val="0E7C7B"/>
+            <a:srgbClr val="EF7D1A"/>
           </a:solidFill>
           <a:ln>
             <a:noFill/>
           </a:ln>
+          <a:effectLst/>
         </p:spPr>
         <p:style>
           <a:lnRef idx="1">
@@ -4043,8 +5716,8 @@
         </p:nvSpPr>
         <p:spPr>
           <a:xfrm>
-            <a:off x="640080" y="1371600"/>
-            <a:ext cx="5120640" cy="4754880"/>
+            <a:off x="502920" y="1463040"/>
+            <a:ext cx="4526280" cy="3291840"/>
           </a:xfrm>
           <a:prstGeom prst="rect">
             <a:avLst/>
@@ -4052,72 +5725,316 @@
           <a:noFill/>
         </p:spPr>
         <p:txBody>
-          <a:bodyPr wrap="square">
+          <a:bodyPr wrap="square" lIns="0" rIns="0" tIns="0" bIns="0">
             <a:spAutoFit/>
           </a:bodyPr>
           <a:lstStyle/>
           <a:p>
-            <a:pPr marL="171450" indent="-171450">
+            <a:pPr marL="190500" indent="-190500">
+              <a:lnSpc>
+                <a:spcPct val="112000"/>
+              </a:lnSpc>
               <a:spcBef>
-                <a:spcPts val="200"/>
+                <a:spcPts val="0"/>
               </a:spcBef>
               <a:spcAft>
-                <a:spcPts val="1000"/>
+                <a:spcPts val="1300"/>
               </a:spcAft>
               <a:buChar char="•"/>
             </a:pPr>
             <a:r>
-              <a:rPr sz="1700" b="0" i="0">
-                <a:solidFill>
-                  <a:srgbClr val="1F2937"/>
-                </a:solidFill>
-              </a:rPr>
-              <a:t>Minyak Goreng rata-rata 2026 Rp22.146/kg (+6.7% vs 2025) — kenaikan tertinggi.</a:t>
-            </a:r>
-          </a:p>
-          <a:p>
-            <a:pPr marL="171450" indent="-171450">
+              <a:rPr sz="1550" b="0" i="0">
+                <a:solidFill>
+                  <a:srgbClr val="2A1E33"/>
+                </a:solidFill>
+                <a:latin typeface="Noto Sans"/>
+              </a:rPr>
+              <a:t/>
+            </a:r>
+            <a:r>
+              <a:rPr sz="1550">
+                <a:solidFill>
+                  <a:srgbClr val="2A1E33"/>
+                </a:solidFill>
+                <a:latin typeface="Noto Sans"/>
+              </a:rPr>
+              <a:t>Minyak Goreng rata-rata 2026 Rp22.146/kg (+6.7% vs 2025): kenaikan tertinggi.</a:t>
+            </a:r>
+          </a:p>
+          <a:p>
+            <a:pPr marL="190500" indent="-190500">
+              <a:lnSpc>
+                <a:spcPct val="112000"/>
+              </a:lnSpc>
               <a:spcBef>
-                <a:spcPts val="200"/>
+                <a:spcPts val="0"/>
               </a:spcBef>
               <a:spcAft>
-                <a:spcPts val="1000"/>
+                <a:spcPts val="1300"/>
               </a:spcAft>
               <a:buChar char="•"/>
             </a:pPr>
             <a:r>
-              <a:rPr sz="1700" b="0" i="0">
-                <a:solidFill>
-                  <a:srgbClr val="1F2937"/>
-                </a:solidFill>
+              <a:rPr sz="1550" b="0" i="0">
+                <a:solidFill>
+                  <a:srgbClr val="2A1E33"/>
+                </a:solidFill>
+                <a:latin typeface="Noto Sans"/>
+              </a:rPr>
+              <a:t/>
+            </a:r>
+            <a:r>
+              <a:rPr sz="1550">
+                <a:solidFill>
+                  <a:srgbClr val="2A1E33"/>
+                </a:solidFill>
+                <a:latin typeface="Noto Sans"/>
               </a:rPr>
               <a:t>Daging Sapi Rp144.214/kg (+6.0%); Beras Rp15.983/kg (+3.0%); Gula Pasir Rp19.539/kg (+2.4%).</a:t>
             </a:r>
           </a:p>
           <a:p>
-            <a:pPr marL="171450" indent="-171450">
+            <a:pPr marL="190500" indent="-190500">
+              <a:lnSpc>
+                <a:spcPct val="112000"/>
+              </a:lnSpc>
               <a:spcBef>
-                <a:spcPts val="200"/>
+                <a:spcPts val="0"/>
               </a:spcBef>
               <a:spcAft>
-                <a:spcPts val="1000"/>
+                <a:spcPts val="1300"/>
               </a:spcAft>
               <a:buChar char="•"/>
             </a:pPr>
             <a:r>
-              <a:rPr sz="1700" b="0" i="0">
-                <a:solidFill>
-                  <a:srgbClr val="1F2937"/>
-                </a:solidFill>
-              </a:rPr>
-              <a:t>Keempat kelompok bergerak naik sepanjang 2026 — tekanan harga pangan bersifat luas, bukan satu komoditas saja.</a:t>
-            </a:r>
+              <a:rPr sz="1550" b="0" i="0">
+                <a:solidFill>
+                  <a:srgbClr val="2A1E33"/>
+                </a:solidFill>
+                <a:latin typeface="Noto Sans"/>
+              </a:rPr>
+              <a:t/>
+            </a:r>
+            <a:r>
+              <a:rPr sz="1550">
+                <a:solidFill>
+                  <a:srgbClr val="2A1E33"/>
+                </a:solidFill>
+                <a:latin typeface="Noto Sans"/>
+              </a:rPr>
+              <a:t>Keempat kelompok bergerak naik sepanjang 2026, tekanan harga pangan bersifat luas, bukan satu komoditas saja.</a:t>
+            </a:r>
+          </a:p>
+        </p:txBody>
+      </p:sp>
+      <p:sp>
+        <p:nvSpPr>
+          <p:cNvPr id="5" name="Rounded Rectangle 4"/>
+          <p:cNvSpPr/>
+          <p:nvPr/>
+        </p:nvSpPr>
+        <p:spPr>
+          <a:xfrm>
+            <a:off x="502920" y="4846320"/>
+            <a:ext cx="4526280" cy="1170432"/>
+          </a:xfrm>
+          <a:prstGeom prst="roundRect">
+            <a:avLst>
+              <a:gd name="adj" fmla="val 11718"/>
+            </a:avLst>
+          </a:prstGeom>
+          <a:solidFill>
+            <a:srgbClr val="5E2A72"/>
+          </a:solidFill>
+          <a:ln>
+            <a:noFill/>
+          </a:ln>
+          <a:effectLst/>
+        </p:spPr>
+        <p:style>
+          <a:lnRef idx="1">
+            <a:schemeClr val="accent1"/>
+          </a:lnRef>
+          <a:fillRef idx="3">
+            <a:schemeClr val="accent1"/>
+          </a:fillRef>
+          <a:effectRef idx="2">
+            <a:schemeClr val="accent1"/>
+          </a:effectRef>
+          <a:fontRef idx="minor">
+            <a:schemeClr val="lt1"/>
+          </a:fontRef>
+        </p:style>
+        <p:txBody>
+          <a:bodyPr rtlCol="0" anchor="ctr"/>
+          <a:lstStyle/>
+          <a:p>
+            <a:pPr algn="ctr"/>
+          </a:p>
+        </p:txBody>
+      </p:sp>
+      <p:sp>
+        <p:nvSpPr>
+          <p:cNvPr id="6" name="TextBox 5"/>
+          <p:cNvSpPr txBox="1"/>
+          <p:nvPr/>
+        </p:nvSpPr>
+        <p:spPr>
+          <a:xfrm>
+            <a:off x="777240" y="5029200"/>
+            <a:ext cx="4023360" cy="1737360"/>
+          </a:xfrm>
+          <a:prstGeom prst="rect">
+            <a:avLst/>
+          </a:prstGeom>
+          <a:noFill/>
+        </p:spPr>
+        <p:txBody>
+          <a:bodyPr wrap="square" lIns="0" rIns="0" tIns="0" bIns="0">
+            <a:spAutoFit/>
+          </a:bodyPr>
+          <a:lstStyle/>
+          <a:p>
+            <a:pPr>
+              <a:lnSpc>
+                <a:spcPct val="100000"/>
+              </a:lnSpc>
+              <a:spcBef>
+                <a:spcPts val="0"/>
+              </a:spcBef>
+              <a:spcAft>
+                <a:spcPts val="200"/>
+              </a:spcAft>
+            </a:pPr>
+            <a:r>
+              <a:rPr sz="2700" b="1" i="0">
+                <a:solidFill>
+                  <a:srgbClr val="EF7D1A"/>
+                </a:solidFill>
+                <a:latin typeface="Noto Sans"/>
+              </a:rPr>
+              <a:t>Rp22.146</a:t>
+            </a:r>
+          </a:p>
+          <a:p>
+            <a:pPr>
+              <a:lnSpc>
+                <a:spcPct val="110000"/>
+              </a:lnSpc>
+              <a:spcBef>
+                <a:spcPts val="0"/>
+              </a:spcBef>
+              <a:spcAft>
+                <a:spcPts val="0"/>
+              </a:spcAft>
+            </a:pPr>
+            <a:r>
+              <a:rPr sz="1300" b="0" i="0">
+                <a:solidFill>
+                  <a:srgbClr val="F8F2E4"/>
+                </a:solidFill>
+                <a:latin typeface="Noto Sans"/>
+              </a:rPr>
+              <a:t>rata-rata minyak goreng per kg, 2026</a:t>
+            </a:r>
+          </a:p>
+        </p:txBody>
+      </p:sp>
+      <p:sp>
+        <p:nvSpPr>
+          <p:cNvPr id="7" name="Rounded Rectangle 6"/>
+          <p:cNvSpPr/>
+          <p:nvPr/>
+        </p:nvSpPr>
+        <p:spPr>
+          <a:xfrm>
+            <a:off x="5349240" y="1417320"/>
+            <a:ext cx="6336792" cy="3977639"/>
+          </a:xfrm>
+          <a:prstGeom prst="roundRect">
+            <a:avLst>
+              <a:gd name="adj" fmla="val 5747"/>
+            </a:avLst>
+          </a:prstGeom>
+          <a:solidFill>
+            <a:srgbClr val="DDCFB4"/>
+          </a:solidFill>
+          <a:ln>
+            <a:noFill/>
+          </a:ln>
+          <a:effectLst/>
+        </p:spPr>
+        <p:style>
+          <a:lnRef idx="1">
+            <a:schemeClr val="accent1"/>
+          </a:lnRef>
+          <a:fillRef idx="3">
+            <a:schemeClr val="accent1"/>
+          </a:fillRef>
+          <a:effectRef idx="2">
+            <a:schemeClr val="accent1"/>
+          </a:effectRef>
+          <a:fontRef idx="minor">
+            <a:schemeClr val="lt1"/>
+          </a:fontRef>
+        </p:style>
+        <p:txBody>
+          <a:bodyPr rtlCol="0" anchor="ctr"/>
+          <a:lstStyle/>
+          <a:p>
+            <a:pPr algn="ctr"/>
+          </a:p>
+        </p:txBody>
+      </p:sp>
+      <p:sp>
+        <p:nvSpPr>
+          <p:cNvPr id="8" name="Rounded Rectangle 7"/>
+          <p:cNvSpPr/>
+          <p:nvPr/>
+        </p:nvSpPr>
+        <p:spPr>
+          <a:xfrm>
+            <a:off x="5413248" y="1481328"/>
+            <a:ext cx="6208776" cy="3849624"/>
+          </a:xfrm>
+          <a:prstGeom prst="roundRect">
+            <a:avLst>
+              <a:gd name="adj" fmla="val 4275"/>
+            </a:avLst>
+          </a:prstGeom>
+          <a:solidFill>
+            <a:srgbClr val="F8F2E4"/>
+          </a:solidFill>
+          <a:ln>
+            <a:noFill/>
+          </a:ln>
+          <a:effectLst/>
+        </p:spPr>
+        <p:style>
+          <a:lnRef idx="1">
+            <a:schemeClr val="accent1"/>
+          </a:lnRef>
+          <a:fillRef idx="3">
+            <a:schemeClr val="accent1"/>
+          </a:fillRef>
+          <a:effectRef idx="2">
+            <a:schemeClr val="accent1"/>
+          </a:effectRef>
+          <a:fontRef idx="minor">
+            <a:schemeClr val="lt1"/>
+          </a:fontRef>
+        </p:style>
+        <p:txBody>
+          <a:bodyPr rtlCol="0" anchor="ctr"/>
+          <a:lstStyle/>
+          <a:p>
+            <a:pPr algn="ctr"/>
           </a:p>
         </p:txBody>
       </p:sp>
       <p:pic>
         <p:nvPicPr>
-          <p:cNvPr id="5" name="Picture 4" descr="01_tren_nasional.png"/>
+          <p:cNvPr id="9" name="Picture 8" descr="01_tren_nasional.png"/>
           <p:cNvPicPr>
             <a:picLocks noChangeAspect="1"/>
           </p:cNvPicPr>
@@ -4131,8 +6048,8 @@
         </p:blipFill>
         <p:spPr>
           <a:xfrm>
-            <a:off x="6217920" y="1371600"/>
-            <a:ext cx="5303520" cy="2481463"/>
+            <a:off x="5596128" y="1810512"/>
+            <a:ext cx="5852160" cy="2738167"/>
           </a:xfrm>
           <a:prstGeom prst="rect">
             <a:avLst/>
@@ -4153,7 +6070,7 @@
     <p:bg>
       <p:bgPr>
         <a:solidFill>
-          <a:srgbClr val="FFFFFF"/>
+          <a:srgbClr val="F0E8D8"/>
         </a:solidFill>
         <a:effectLst/>
       </p:bgPr>
@@ -4173,8 +6090,8 @@
         </p:nvSpPr>
         <p:spPr>
           <a:xfrm>
-            <a:off x="640080" y="274320"/>
-            <a:ext cx="10881360" cy="822960"/>
+            <a:off x="502920" y="384048"/>
+            <a:ext cx="11155680" cy="914400"/>
           </a:xfrm>
           <a:prstGeom prst="rect">
             <a:avLst/>
@@ -4182,21 +6099,28 @@
           <a:noFill/>
         </p:spPr>
         <p:txBody>
-          <a:bodyPr wrap="square">
+          <a:bodyPr wrap="square" lIns="0" rIns="0" tIns="0" bIns="0">
             <a:spAutoFit/>
           </a:bodyPr>
           <a:lstStyle/>
           <a:p>
             <a:pPr>
+              <a:lnSpc>
+                <a:spcPct val="100000"/>
+              </a:lnSpc>
+              <a:spcBef>
+                <a:spcPts val="0"/>
+              </a:spcBef>
               <a:spcAft>
-                <a:spcPts val="800"/>
+                <a:spcPts val="0"/>
               </a:spcAft>
             </a:pPr>
             <a:r>
-              <a:rPr sz="3000" b="1" i="0">
-                <a:solidFill>
-                  <a:srgbClr val="1E3A8A"/>
-                </a:solidFill>
+              <a:rPr sz="3100" b="1" i="0">
+                <a:solidFill>
+                  <a:srgbClr val="2A1E33"/>
+                </a:solidFill>
+                <a:latin typeface="Noto Sans"/>
               </a:rPr>
               <a:t>Siapa Naik Paling Tinggi?</a:t>
             </a:r>
@@ -4205,24 +6129,27 @@
       </p:sp>
       <p:sp>
         <p:nvSpPr>
-          <p:cNvPr id="3" name="Rectangle 2"/>
+          <p:cNvPr id="3" name="Rounded Rectangle 2"/>
           <p:cNvSpPr/>
           <p:nvPr/>
         </p:nvSpPr>
         <p:spPr>
           <a:xfrm>
-            <a:off x="640080" y="1051560"/>
-            <a:ext cx="1371600" cy="54864"/>
-          </a:xfrm>
-          <a:prstGeom prst="rect">
-            <a:avLst/>
+            <a:off x="521208" y="1097280"/>
+            <a:ext cx="777240" cy="82296"/>
+          </a:xfrm>
+          <a:prstGeom prst="roundRect">
+            <a:avLst>
+              <a:gd name="adj" fmla="val 50000"/>
+            </a:avLst>
           </a:prstGeom>
           <a:solidFill>
-            <a:srgbClr val="0E7C7B"/>
+            <a:srgbClr val="EF7D1A"/>
           </a:solidFill>
           <a:ln>
             <a:noFill/>
           </a:ln>
+          <a:effectLst/>
         </p:spPr>
         <p:style>
           <a:lnRef idx="1">
@@ -4248,106 +6175,99 @@
       </p:sp>
       <p:sp>
         <p:nvSpPr>
-          <p:cNvPr id="4" name="TextBox 3"/>
-          <p:cNvSpPr txBox="1"/>
-          <p:nvPr/>
-        </p:nvSpPr>
-        <p:spPr>
-          <a:xfrm>
-            <a:off x="640080" y="1371600"/>
-            <a:ext cx="5120640" cy="4754880"/>
-          </a:xfrm>
-          <a:prstGeom prst="rect">
-            <a:avLst/>
-          </a:prstGeom>
-          <a:noFill/>
-        </p:spPr>
-        <p:txBody>
-          <a:bodyPr wrap="square">
-            <a:spAutoFit/>
-          </a:bodyPr>
-          <a:lstStyle/>
-          <a:p>
-            <a:pPr marL="171450" indent="-171450">
-              <a:spcBef>
-                <a:spcPts val="200"/>
-              </a:spcBef>
-              <a:spcAft>
-                <a:spcPts val="1000"/>
-              </a:spcAft>
-              <a:buChar char="•"/>
-            </a:pPr>
-            <a:r>
-              <a:rPr sz="1700" b="0" i="0">
-                <a:solidFill>
-                  <a:srgbClr val="1F2937"/>
-                </a:solidFill>
-              </a:rPr>
-              <a:t>Minyak Goreng: +6.7% — juara kenaikan, didorong Minyak Goreng Curah (+7.3%).</a:t>
-            </a:r>
-          </a:p>
-          <a:p>
-            <a:pPr marL="171450" indent="-171450">
-              <a:spcBef>
-                <a:spcPts val="200"/>
-              </a:spcBef>
-              <a:spcAft>
-                <a:spcPts val="1000"/>
-              </a:spcAft>
-              <a:buChar char="•"/>
-            </a:pPr>
-            <a:r>
-              <a:rPr sz="1700" b="0" i="0">
-                <a:solidFill>
-                  <a:srgbClr val="1F2937"/>
-                </a:solidFill>
-              </a:rPr>
-              <a:t>Daging Sapi: +6.0% — kedua tertinggi, harga rata-rata 2026 menembus Rp144.214/kg.</a:t>
-            </a:r>
-          </a:p>
-          <a:p>
-            <a:pPr marL="171450" indent="-171450">
-              <a:spcBef>
-                <a:spcPts val="200"/>
-              </a:spcBef>
-              <a:spcAft>
-                <a:spcPts val="1000"/>
-              </a:spcAft>
-              <a:buChar char="•"/>
-            </a:pPr>
-            <a:r>
-              <a:rPr sz="1700" b="0" i="0">
-                <a:solidFill>
-                  <a:srgbClr val="1F2937"/>
-                </a:solidFill>
-              </a:rPr>
-              <a:t>Beras: +3.0% — moderat tapi basisnya besar: Rp15.515 ke Rp15.983/kg.</a:t>
-            </a:r>
-          </a:p>
-          <a:p>
-            <a:pPr marL="171450" indent="-171450">
-              <a:spcBef>
-                <a:spcPts val="200"/>
-              </a:spcBef>
-              <a:spcAft>
-                <a:spcPts val="1000"/>
-              </a:spcAft>
-              <a:buChar char="•"/>
-            </a:pPr>
-            <a:r>
-              <a:rPr sz="1700" b="0" i="0">
-                <a:solidFill>
-                  <a:srgbClr val="1F2937"/>
-                </a:solidFill>
-              </a:rPr>
-              <a:t>Gula Pasir: +2.4% — kenaikan paling rendah, harga paling terkendali.</a:t>
-            </a:r>
+          <p:cNvPr id="4" name="Rounded Rectangle 3"/>
+          <p:cNvSpPr/>
+          <p:nvPr/>
+        </p:nvSpPr>
+        <p:spPr>
+          <a:xfrm>
+            <a:off x="502920" y="1417320"/>
+            <a:ext cx="5120640" cy="3520440"/>
+          </a:xfrm>
+          <a:prstGeom prst="roundRect">
+            <a:avLst>
+              <a:gd name="adj" fmla="val 6493"/>
+            </a:avLst>
+          </a:prstGeom>
+          <a:solidFill>
+            <a:srgbClr val="DDCFB4"/>
+          </a:solidFill>
+          <a:ln>
+            <a:noFill/>
+          </a:ln>
+          <a:effectLst/>
+        </p:spPr>
+        <p:style>
+          <a:lnRef idx="1">
+            <a:schemeClr val="accent1"/>
+          </a:lnRef>
+          <a:fillRef idx="3">
+            <a:schemeClr val="accent1"/>
+          </a:fillRef>
+          <a:effectRef idx="2">
+            <a:schemeClr val="accent1"/>
+          </a:effectRef>
+          <a:fontRef idx="minor">
+            <a:schemeClr val="lt1"/>
+          </a:fontRef>
+        </p:style>
+        <p:txBody>
+          <a:bodyPr rtlCol="0" anchor="ctr"/>
+          <a:lstStyle/>
+          <a:p>
+            <a:pPr algn="ctr"/>
+          </a:p>
+        </p:txBody>
+      </p:sp>
+      <p:sp>
+        <p:nvSpPr>
+          <p:cNvPr id="5" name="Rounded Rectangle 4"/>
+          <p:cNvSpPr/>
+          <p:nvPr/>
+        </p:nvSpPr>
+        <p:spPr>
+          <a:xfrm>
+            <a:off x="566928" y="1481328"/>
+            <a:ext cx="4992624" cy="3392424"/>
+          </a:xfrm>
+          <a:prstGeom prst="roundRect">
+            <a:avLst>
+              <a:gd name="adj" fmla="val 4851"/>
+            </a:avLst>
+          </a:prstGeom>
+          <a:solidFill>
+            <a:srgbClr val="F8F2E4"/>
+          </a:solidFill>
+          <a:ln>
+            <a:noFill/>
+          </a:ln>
+          <a:effectLst/>
+        </p:spPr>
+        <p:style>
+          <a:lnRef idx="1">
+            <a:schemeClr val="accent1"/>
+          </a:lnRef>
+          <a:fillRef idx="3">
+            <a:schemeClr val="accent1"/>
+          </a:fillRef>
+          <a:effectRef idx="2">
+            <a:schemeClr val="accent1"/>
+          </a:effectRef>
+          <a:fontRef idx="minor">
+            <a:schemeClr val="lt1"/>
+          </a:fontRef>
+        </p:style>
+        <p:txBody>
+          <a:bodyPr rtlCol="0" anchor="ctr"/>
+          <a:lstStyle/>
+          <a:p>
+            <a:pPr algn="ctr"/>
           </a:p>
         </p:txBody>
       </p:sp>
       <p:pic>
         <p:nvPicPr>
-          <p:cNvPr id="5" name="Picture 4" descr="02_yoy_kelompok.png"/>
+          <p:cNvPr id="6" name="Picture 5" descr="02_yoy_kelompok.png"/>
           <p:cNvPicPr>
             <a:picLocks noChangeAspect="1"/>
           </p:cNvPicPr>
@@ -4361,14 +6281,256 @@
         </p:blipFill>
         <p:spPr>
           <a:xfrm>
-            <a:off x="6217920" y="1371600"/>
-            <a:ext cx="5303520" cy="2886726"/>
+            <a:off x="804672" y="1783080"/>
+            <a:ext cx="4526280" cy="2463671"/>
           </a:xfrm>
           <a:prstGeom prst="rect">
             <a:avLst/>
           </a:prstGeom>
         </p:spPr>
       </p:pic>
+      <p:sp>
+        <p:nvSpPr>
+          <p:cNvPr id="7" name="TextBox 6"/>
+          <p:cNvSpPr txBox="1"/>
+          <p:nvPr/>
+        </p:nvSpPr>
+        <p:spPr>
+          <a:xfrm>
+            <a:off x="5989320" y="1481328"/>
+            <a:ext cx="5715000" cy="3474720"/>
+          </a:xfrm>
+          <a:prstGeom prst="rect">
+            <a:avLst/>
+          </a:prstGeom>
+          <a:noFill/>
+        </p:spPr>
+        <p:txBody>
+          <a:bodyPr wrap="square" lIns="0" rIns="0" tIns="0" bIns="0">
+            <a:spAutoFit/>
+          </a:bodyPr>
+          <a:lstStyle/>
+          <a:p>
+            <a:pPr marL="190500" indent="-190500">
+              <a:lnSpc>
+                <a:spcPct val="112000"/>
+              </a:lnSpc>
+              <a:spcBef>
+                <a:spcPts val="0"/>
+              </a:spcBef>
+              <a:spcAft>
+                <a:spcPts val="1200"/>
+              </a:spcAft>
+              <a:buChar char="•"/>
+            </a:pPr>
+            <a:r>
+              <a:rPr sz="1550" b="0" i="0">
+                <a:solidFill>
+                  <a:srgbClr val="2A1E33"/>
+                </a:solidFill>
+                <a:latin typeface="Noto Sans"/>
+              </a:rPr>
+              <a:t/>
+            </a:r>
+            <a:r>
+              <a:rPr sz="1550">
+                <a:solidFill>
+                  <a:srgbClr val="2A1E33"/>
+                </a:solidFill>
+                <a:latin typeface="Noto Sans"/>
+              </a:rPr>
+              <a:t>Minyak Goreng: +6.7%, juara kenaikan, didorong Minyak Goreng Curah (+7.3%).</a:t>
+            </a:r>
+          </a:p>
+          <a:p>
+            <a:pPr marL="190500" indent="-190500">
+              <a:lnSpc>
+                <a:spcPct val="112000"/>
+              </a:lnSpc>
+              <a:spcBef>
+                <a:spcPts val="0"/>
+              </a:spcBef>
+              <a:spcAft>
+                <a:spcPts val="1200"/>
+              </a:spcAft>
+              <a:buChar char="•"/>
+            </a:pPr>
+            <a:r>
+              <a:rPr sz="1550" b="0" i="0">
+                <a:solidFill>
+                  <a:srgbClr val="2A1E33"/>
+                </a:solidFill>
+                <a:latin typeface="Noto Sans"/>
+              </a:rPr>
+              <a:t/>
+            </a:r>
+            <a:r>
+              <a:rPr sz="1550">
+                <a:solidFill>
+                  <a:srgbClr val="2A1E33"/>
+                </a:solidFill>
+                <a:latin typeface="Noto Sans"/>
+              </a:rPr>
+              <a:t>Daging Sapi: +6.0%, kedua tertinggi, harga rata-rata 2026 menembus Rp144.214/kg.</a:t>
+            </a:r>
+          </a:p>
+          <a:p>
+            <a:pPr marL="190500" indent="-190500">
+              <a:lnSpc>
+                <a:spcPct val="112000"/>
+              </a:lnSpc>
+              <a:spcBef>
+                <a:spcPts val="0"/>
+              </a:spcBef>
+              <a:spcAft>
+                <a:spcPts val="1200"/>
+              </a:spcAft>
+              <a:buChar char="•"/>
+            </a:pPr>
+            <a:r>
+              <a:rPr sz="1550" b="0" i="0">
+                <a:solidFill>
+                  <a:srgbClr val="2A1E33"/>
+                </a:solidFill>
+                <a:latin typeface="Noto Sans"/>
+              </a:rPr>
+              <a:t/>
+            </a:r>
+            <a:r>
+              <a:rPr sz="1550">
+                <a:solidFill>
+                  <a:srgbClr val="2A1E33"/>
+                </a:solidFill>
+                <a:latin typeface="Noto Sans"/>
+              </a:rPr>
+              <a:t>Beras: +3.0%, moderat tapi basisnya besar: Rp15.515 ke Rp15.983/kg.</a:t>
+            </a:r>
+          </a:p>
+          <a:p>
+            <a:pPr marL="190500" indent="-190500">
+              <a:lnSpc>
+                <a:spcPct val="112000"/>
+              </a:lnSpc>
+              <a:spcBef>
+                <a:spcPts val="0"/>
+              </a:spcBef>
+              <a:spcAft>
+                <a:spcPts val="1200"/>
+              </a:spcAft>
+              <a:buChar char="•"/>
+            </a:pPr>
+            <a:r>
+              <a:rPr sz="1550" b="0" i="0">
+                <a:solidFill>
+                  <a:srgbClr val="2A1E33"/>
+                </a:solidFill>
+                <a:latin typeface="Noto Sans"/>
+              </a:rPr>
+              <a:t/>
+            </a:r>
+            <a:r>
+              <a:rPr sz="1550">
+                <a:solidFill>
+                  <a:srgbClr val="2A1E33"/>
+                </a:solidFill>
+                <a:latin typeface="Noto Sans"/>
+              </a:rPr>
+              <a:t>Gula Pasir: +2.4%, kenaikan paling rendah, harga paling terkendali.</a:t>
+            </a:r>
+          </a:p>
+        </p:txBody>
+      </p:sp>
+      <p:sp>
+        <p:nvSpPr>
+          <p:cNvPr id="8" name="Rounded Rectangle 7"/>
+          <p:cNvSpPr/>
+          <p:nvPr/>
+        </p:nvSpPr>
+        <p:spPr>
+          <a:xfrm>
+            <a:off x="502920" y="5193792"/>
+            <a:ext cx="11183112" cy="932688"/>
+          </a:xfrm>
+          <a:prstGeom prst="roundRect">
+            <a:avLst>
+              <a:gd name="adj" fmla="val 13725"/>
+            </a:avLst>
+          </a:prstGeom>
+          <a:solidFill>
+            <a:srgbClr val="F8F2E4"/>
+          </a:solidFill>
+          <a:ln>
+            <a:noFill/>
+          </a:ln>
+          <a:effectLst/>
+        </p:spPr>
+        <p:style>
+          <a:lnRef idx="1">
+            <a:schemeClr val="accent1"/>
+          </a:lnRef>
+          <a:fillRef idx="3">
+            <a:schemeClr val="accent1"/>
+          </a:fillRef>
+          <a:effectRef idx="2">
+            <a:schemeClr val="accent1"/>
+          </a:effectRef>
+          <a:fontRef idx="minor">
+            <a:schemeClr val="lt1"/>
+          </a:fontRef>
+        </p:style>
+        <p:txBody>
+          <a:bodyPr rtlCol="0" anchor="ctr"/>
+          <a:lstStyle/>
+          <a:p>
+            <a:pPr algn="ctr"/>
+          </a:p>
+        </p:txBody>
+      </p:sp>
+      <p:sp>
+        <p:nvSpPr>
+          <p:cNvPr id="9" name="TextBox 8"/>
+          <p:cNvSpPr txBox="1"/>
+          <p:nvPr/>
+        </p:nvSpPr>
+        <p:spPr>
+          <a:xfrm>
+            <a:off x="960120" y="5394960"/>
+            <a:ext cx="10424160" cy="548640"/>
+          </a:xfrm>
+          <a:prstGeom prst="rect">
+            <a:avLst/>
+          </a:prstGeom>
+          <a:noFill/>
+        </p:spPr>
+        <p:txBody>
+          <a:bodyPr wrap="square" lIns="0" rIns="0" tIns="0" bIns="0">
+            <a:spAutoFit/>
+          </a:bodyPr>
+          <a:lstStyle/>
+          <a:p>
+            <a:pPr>
+              <a:lnSpc>
+                <a:spcPct val="100000"/>
+              </a:lnSpc>
+              <a:spcBef>
+                <a:spcPts val="0"/>
+              </a:spcBef>
+              <a:spcAft>
+                <a:spcPts val="0"/>
+              </a:spcAft>
+            </a:pPr>
+            <a:r>
+              <a:rPr sz="1600" b="1" i="0">
+                <a:solidFill>
+                  <a:srgbClr val="5E2A72"/>
+                </a:solidFill>
+                <a:latin typeface="Noto Sans"/>
+              </a:rPr>
+              <a:t>Kenaikan 2026 vs 2025:   Minyak Goreng +6,7%      Daging Sapi +6,0%      Beras +3,0%      Gula Pasir +2,4%</a:t>
+            </a:r>
+          </a:p>
+        </p:txBody>
+      </p:sp>
     </p:spTree>
   </p:cSld>
   <p:clrMapOvr>
@@ -4383,7 +6545,7 @@
     <p:bg>
       <p:bgPr>
         <a:solidFill>
-          <a:srgbClr val="FFFFFF"/>
+          <a:srgbClr val="F0E8D8"/>
         </a:solidFill>
         <a:effectLst/>
       </p:bgPr>
@@ -4403,8 +6565,8 @@
         </p:nvSpPr>
         <p:spPr>
           <a:xfrm>
-            <a:off x="640080" y="274320"/>
-            <a:ext cx="10881360" cy="822960"/>
+            <a:off x="502920" y="384048"/>
+            <a:ext cx="11155680" cy="914400"/>
           </a:xfrm>
           <a:prstGeom prst="rect">
             <a:avLst/>
@@ -4412,21 +6574,28 @@
           <a:noFill/>
         </p:spPr>
         <p:txBody>
-          <a:bodyPr wrap="square">
+          <a:bodyPr wrap="square" lIns="0" rIns="0" tIns="0" bIns="0">
             <a:spAutoFit/>
           </a:bodyPr>
           <a:lstStyle/>
           <a:p>
             <a:pPr>
+              <a:lnSpc>
+                <a:spcPct val="100000"/>
+              </a:lnSpc>
+              <a:spcBef>
+                <a:spcPts val="0"/>
+              </a:spcBef>
               <a:spcAft>
-                <a:spcPts val="800"/>
+                <a:spcPts val="0"/>
               </a:spcAft>
             </a:pPr>
             <a:r>
-              <a:rPr sz="3000" b="1" i="0">
-                <a:solidFill>
-                  <a:srgbClr val="1E3A8A"/>
-                </a:solidFill>
+              <a:rPr sz="3100" b="1" i="0">
+                <a:solidFill>
+                  <a:srgbClr val="2A1E33"/>
+                </a:solidFill>
+                <a:latin typeface="Noto Sans"/>
               </a:rPr>
               <a:t>Volatilitas: Mana yang Paling Liar?</a:t>
             </a:r>
@@ -4435,24 +6604,27 @@
       </p:sp>
       <p:sp>
         <p:nvSpPr>
-          <p:cNvPr id="3" name="Rectangle 2"/>
+          <p:cNvPr id="3" name="Rounded Rectangle 2"/>
           <p:cNvSpPr/>
           <p:nvPr/>
         </p:nvSpPr>
         <p:spPr>
           <a:xfrm>
-            <a:off x="640080" y="1051560"/>
-            <a:ext cx="1371600" cy="54864"/>
-          </a:xfrm>
-          <a:prstGeom prst="rect">
-            <a:avLst/>
+            <a:off x="521208" y="1097280"/>
+            <a:ext cx="777240" cy="82296"/>
+          </a:xfrm>
+          <a:prstGeom prst="roundRect">
+            <a:avLst>
+              <a:gd name="adj" fmla="val 50000"/>
+            </a:avLst>
           </a:prstGeom>
           <a:solidFill>
-            <a:srgbClr val="0E7C7B"/>
+            <a:srgbClr val="EF7D1A"/>
           </a:solidFill>
           <a:ln>
             <a:noFill/>
           </a:ln>
+          <a:effectLst/>
         </p:spPr>
         <p:style>
           <a:lnRef idx="1">
@@ -4478,14 +6650,60 @@
       </p:sp>
       <p:sp>
         <p:nvSpPr>
-          <p:cNvPr id="4" name="TextBox 3"/>
+          <p:cNvPr id="4" name="Rounded Rectangle 3"/>
+          <p:cNvSpPr/>
+          <p:nvPr/>
+        </p:nvSpPr>
+        <p:spPr>
+          <a:xfrm>
+            <a:off x="502920" y="1417320"/>
+            <a:ext cx="4572000" cy="1783080"/>
+          </a:xfrm>
+          <a:prstGeom prst="roundRect">
+            <a:avLst>
+              <a:gd name="adj" fmla="val 8205"/>
+            </a:avLst>
+          </a:prstGeom>
+          <a:solidFill>
+            <a:srgbClr val="5E2A72"/>
+          </a:solidFill>
+          <a:ln>
+            <a:noFill/>
+          </a:ln>
+          <a:effectLst/>
+        </p:spPr>
+        <p:style>
+          <a:lnRef idx="1">
+            <a:schemeClr val="accent1"/>
+          </a:lnRef>
+          <a:fillRef idx="3">
+            <a:schemeClr val="accent1"/>
+          </a:fillRef>
+          <a:effectRef idx="2">
+            <a:schemeClr val="accent1"/>
+          </a:effectRef>
+          <a:fontRef idx="minor">
+            <a:schemeClr val="lt1"/>
+          </a:fontRef>
+        </p:style>
+        <p:txBody>
+          <a:bodyPr rtlCol="0" anchor="ctr"/>
+          <a:lstStyle/>
+          <a:p>
+            <a:pPr algn="ctr"/>
+          </a:p>
+        </p:txBody>
+      </p:sp>
+      <p:sp>
+        <p:nvSpPr>
+          <p:cNvPr id="5" name="TextBox 4"/>
           <p:cNvSpPr txBox="1"/>
           <p:nvPr/>
         </p:nvSpPr>
         <p:spPr>
           <a:xfrm>
-            <a:off x="640080" y="1371600"/>
-            <a:ext cx="5120640" cy="4754880"/>
+            <a:off x="822960" y="1627632"/>
+            <a:ext cx="3977639" cy="1737360"/>
           </a:xfrm>
           <a:prstGeom prst="rect">
             <a:avLst/>
@@ -4493,14 +6711,84 @@
           <a:noFill/>
         </p:spPr>
         <p:txBody>
-          <a:bodyPr wrap="square">
+          <a:bodyPr wrap="square" lIns="0" rIns="0" tIns="0" bIns="0">
             <a:spAutoFit/>
           </a:bodyPr>
           <a:lstStyle/>
           <a:p>
-            <a:pPr marL="171450" indent="-171450">
+            <a:pPr>
+              <a:lnSpc>
+                <a:spcPct val="100000"/>
+              </a:lnSpc>
               <a:spcBef>
+                <a:spcPts val="0"/>
+              </a:spcBef>
+              <a:spcAft>
                 <a:spcPts val="200"/>
+              </a:spcAft>
+            </a:pPr>
+            <a:r>
+              <a:rPr sz="4800" b="1" i="0">
+                <a:solidFill>
+                  <a:srgbClr val="EF7D1A"/>
+                </a:solidFill>
+                <a:latin typeface="Noto Sans"/>
+              </a:rPr>
+              <a:t>4,3%</a:t>
+            </a:r>
+          </a:p>
+          <a:p>
+            <a:pPr>
+              <a:lnSpc>
+                <a:spcPct val="110000"/>
+              </a:lnSpc>
+              <a:spcBef>
+                <a:spcPts val="0"/>
+              </a:spcBef>
+              <a:spcAft>
+                <a:spcPts val="0"/>
+              </a:spcAft>
+            </a:pPr>
+            <a:r>
+              <a:rPr sz="1300" b="0" i="0">
+                <a:solidFill>
+                  <a:srgbClr val="F8F2E4"/>
+                </a:solidFill>
+                <a:latin typeface="Noto Sans"/>
+              </a:rPr>
+              <a:t>CV Minyak Goreng Curah, komoditas paling volatile dari 13 komoditas</a:t>
+            </a:r>
+          </a:p>
+        </p:txBody>
+      </p:sp>
+      <p:sp>
+        <p:nvSpPr>
+          <p:cNvPr id="6" name="TextBox 5"/>
+          <p:cNvSpPr txBox="1"/>
+          <p:nvPr/>
+        </p:nvSpPr>
+        <p:spPr>
+          <a:xfrm>
+            <a:off x="502920" y="3429000"/>
+            <a:ext cx="4572000" cy="2651760"/>
+          </a:xfrm>
+          <a:prstGeom prst="rect">
+            <a:avLst/>
+          </a:prstGeom>
+          <a:noFill/>
+        </p:spPr>
+        <p:txBody>
+          <a:bodyPr wrap="square" lIns="0" rIns="0" tIns="0" bIns="0">
+            <a:spAutoFit/>
+          </a:bodyPr>
+          <a:lstStyle/>
+          <a:p>
+            <a:pPr marL="190500" indent="-190500">
+              <a:lnSpc>
+                <a:spcPct val="112000"/>
+              </a:lnSpc>
+              <a:spcBef>
+                <a:spcPts val="0"/>
               </a:spcBef>
               <a:spcAft>
                 <a:spcPts val="1000"/>
@@ -4508,18 +6796,31 @@
               <a:buChar char="•"/>
             </a:pPr>
             <a:r>
-              <a:rPr sz="1700" b="0" i="0">
-                <a:solidFill>
-                  <a:srgbClr val="1F2937"/>
-                </a:solidFill>
+              <a:rPr sz="1450" b="0" i="0">
+                <a:solidFill>
+                  <a:srgbClr val="2A1E33"/>
+                </a:solidFill>
+                <a:latin typeface="Noto Sans"/>
+              </a:rPr>
+              <a:t/>
+            </a:r>
+            <a:r>
+              <a:rPr sz="1450">
+                <a:solidFill>
+                  <a:srgbClr val="2A1E33"/>
+                </a:solidFill>
+                <a:latin typeface="Noto Sans"/>
               </a:rPr>
               <a:t>Minyak Goreng Curah paling volatile: CV 4.3%, melonjak ke Rp20.750/kg pada 2026-06-04.</a:t>
             </a:r>
           </a:p>
           <a:p>
-            <a:pPr marL="171450" indent="-171450">
+            <a:pPr marL="190500" indent="-190500">
+              <a:lnSpc>
+                <a:spcPct val="112000"/>
+              </a:lnSpc>
               <a:spcBef>
-                <a:spcPts val="200"/>
+                <a:spcPts val="0"/>
               </a:spcBef>
               <a:spcAft>
                 <a:spcPts val="1000"/>
@@ -4527,18 +6828,31 @@
               <a:buChar char="•"/>
             </a:pPr>
             <a:r>
-              <a:rPr sz="1700" b="0" i="0">
-                <a:solidFill>
-                  <a:srgbClr val="1F2937"/>
-                </a:solidFill>
+              <a:rPr sz="1450" b="0" i="0">
+                <a:solidFill>
+                  <a:srgbClr val="2A1E33"/>
+                </a:solidFill>
+                <a:latin typeface="Noto Sans"/>
+              </a:rPr>
+              <a:t/>
+            </a:r>
+            <a:r>
+              <a:rPr sz="1450">
+                <a:solidFill>
+                  <a:srgbClr val="2A1E33"/>
+                </a:solidFill>
+                <a:latin typeface="Noto Sans"/>
               </a:rPr>
               <a:t>Gula Pasir Kualitas Premium paling stabil: CV 1.3%.</a:t>
             </a:r>
           </a:p>
           <a:p>
-            <a:pPr marL="171450" indent="-171450">
+            <a:pPr marL="190500" indent="-190500">
+              <a:lnSpc>
+                <a:spcPct val="112000"/>
+              </a:lnSpc>
               <a:spcBef>
-                <a:spcPts val="200"/>
+                <a:spcPts val="0"/>
               </a:spcBef>
               <a:spcAft>
                 <a:spcPts val="1000"/>
@@ -4546,18 +6860,31 @@
               <a:buChar char="•"/>
             </a:pPr>
             <a:r>
-              <a:rPr sz="1700" b="0" i="0">
-                <a:solidFill>
-                  <a:srgbClr val="1F2937"/>
-                </a:solidFill>
-              </a:rPr>
-              <a:t>Pola: minyak goreng curah (tanpa merek, rantai pasok pendek) jauh lebih liar dibanding versi kemasan bermerek — kualitas kemasan = stabilitas harga.</a:t>
-            </a:r>
-          </a:p>
-          <a:p>
-            <a:pPr marL="171450" indent="-171450">
+              <a:rPr sz="1450" b="0" i="0">
+                <a:solidFill>
+                  <a:srgbClr val="2A1E33"/>
+                </a:solidFill>
+                <a:latin typeface="Noto Sans"/>
+              </a:rPr>
+              <a:t/>
+            </a:r>
+            <a:r>
+              <a:rPr sz="1450">
+                <a:solidFill>
+                  <a:srgbClr val="2A1E33"/>
+                </a:solidFill>
+                <a:latin typeface="Noto Sans"/>
+              </a:rPr>
+              <a:t>Pola: minyak goreng curah (tanpa merek, rantai pasok pendek) jauh lebih liar dibanding versi kemasan bermerek: kualitas kemasan = stabilitas harga.</a:t>
+            </a:r>
+          </a:p>
+          <a:p>
+            <a:pPr marL="190500" indent="-190500">
+              <a:lnSpc>
+                <a:spcPct val="112000"/>
+              </a:lnSpc>
               <a:spcBef>
-                <a:spcPts val="200"/>
+                <a:spcPts val="0"/>
               </a:spcBef>
               <a:spcAft>
                 <a:spcPts val="1000"/>
@@ -4565,19 +6892,121 @@
               <a:buChar char="•"/>
             </a:pPr>
             <a:r>
-              <a:rPr sz="1700" b="0" i="0">
-                <a:solidFill>
-                  <a:srgbClr val="1F2937"/>
-                </a:solidFill>
+              <a:rPr sz="1450" b="0" i="0">
+                <a:solidFill>
+                  <a:srgbClr val="2A1E33"/>
+                </a:solidFill>
+                <a:latin typeface="Noto Sans"/>
+              </a:rPr>
+              <a:t/>
+            </a:r>
+            <a:r>
+              <a:rPr sz="1450">
+                <a:solidFill>
+                  <a:srgbClr val="2A1E33"/>
+                </a:solidFill>
+                <a:latin typeface="Noto Sans"/>
               </a:rPr>
               <a:t>Volatilitas tinggi = ketidakpastian bagi pedagang dan konsumen.</a:t>
             </a:r>
+          </a:p>
+        </p:txBody>
+      </p:sp>
+      <p:sp>
+        <p:nvSpPr>
+          <p:cNvPr id="7" name="Rounded Rectangle 6"/>
+          <p:cNvSpPr/>
+          <p:nvPr/>
+        </p:nvSpPr>
+        <p:spPr>
+          <a:xfrm>
+            <a:off x="5394960" y="1417320"/>
+            <a:ext cx="6291072" cy="4206240"/>
+          </a:xfrm>
+          <a:prstGeom prst="roundRect">
+            <a:avLst>
+              <a:gd name="adj" fmla="val 5434"/>
+            </a:avLst>
+          </a:prstGeom>
+          <a:solidFill>
+            <a:srgbClr val="DDCFB4"/>
+          </a:solidFill>
+          <a:ln>
+            <a:noFill/>
+          </a:ln>
+          <a:effectLst/>
+        </p:spPr>
+        <p:style>
+          <a:lnRef idx="1">
+            <a:schemeClr val="accent1"/>
+          </a:lnRef>
+          <a:fillRef idx="3">
+            <a:schemeClr val="accent1"/>
+          </a:fillRef>
+          <a:effectRef idx="2">
+            <a:schemeClr val="accent1"/>
+          </a:effectRef>
+          <a:fontRef idx="minor">
+            <a:schemeClr val="lt1"/>
+          </a:fontRef>
+        </p:style>
+        <p:txBody>
+          <a:bodyPr rtlCol="0" anchor="ctr"/>
+          <a:lstStyle/>
+          <a:p>
+            <a:pPr algn="ctr"/>
+          </a:p>
+        </p:txBody>
+      </p:sp>
+      <p:sp>
+        <p:nvSpPr>
+          <p:cNvPr id="8" name="Rounded Rectangle 7"/>
+          <p:cNvSpPr/>
+          <p:nvPr/>
+        </p:nvSpPr>
+        <p:spPr>
+          <a:xfrm>
+            <a:off x="5458968" y="1481328"/>
+            <a:ext cx="6163056" cy="4078224"/>
+          </a:xfrm>
+          <a:prstGeom prst="roundRect">
+            <a:avLst>
+              <a:gd name="adj" fmla="val 4035"/>
+            </a:avLst>
+          </a:prstGeom>
+          <a:solidFill>
+            <a:srgbClr val="F8F2E4"/>
+          </a:solidFill>
+          <a:ln>
+            <a:noFill/>
+          </a:ln>
+          <a:effectLst/>
+        </p:spPr>
+        <p:style>
+          <a:lnRef idx="1">
+            <a:schemeClr val="accent1"/>
+          </a:lnRef>
+          <a:fillRef idx="3">
+            <a:schemeClr val="accent1"/>
+          </a:fillRef>
+          <a:effectRef idx="2">
+            <a:schemeClr val="accent1"/>
+          </a:effectRef>
+          <a:fontRef idx="minor">
+            <a:schemeClr val="lt1"/>
+          </a:fontRef>
+        </p:style>
+        <p:txBody>
+          <a:bodyPr rtlCol="0" anchor="ctr"/>
+          <a:lstStyle/>
+          <a:p>
+            <a:pPr algn="ctr"/>
           </a:p>
         </p:txBody>
       </p:sp>
       <p:pic>
         <p:nvPicPr>
-          <p:cNvPr id="5" name="Picture 4" descr="03_volatilitas.png"/>
+          <p:cNvPr id="9" name="Picture 8" descr="03_volatilitas.png"/>
           <p:cNvPicPr>
             <a:picLocks noChangeAspect="1"/>
           </p:cNvPicPr>
@@ -4591,8 +7020,8 @@
         </p:blipFill>
         <p:spPr>
           <a:xfrm>
-            <a:off x="6217920" y="1371600"/>
-            <a:ext cx="5303520" cy="3146491"/>
+            <a:off x="5687568" y="1764792"/>
+            <a:ext cx="5715000" cy="3393148"/>
           </a:xfrm>
           <a:prstGeom prst="rect">
             <a:avLst/>
@@ -4613,7 +7042,7 @@
     <p:bg>
       <p:bgPr>
         <a:solidFill>
-          <a:srgbClr val="FFFFFF"/>
+          <a:srgbClr val="F0E8D8"/>
         </a:solidFill>
         <a:effectLst/>
       </p:bgPr>
@@ -4633,8 +7062,8 @@
         </p:nvSpPr>
         <p:spPr>
           <a:xfrm>
-            <a:off x="640080" y="274320"/>
-            <a:ext cx="10881360" cy="822960"/>
+            <a:off x="502920" y="384048"/>
+            <a:ext cx="11155680" cy="914400"/>
           </a:xfrm>
           <a:prstGeom prst="rect">
             <a:avLst/>
@@ -4642,21 +7071,28 @@
           <a:noFill/>
         </p:spPr>
         <p:txBody>
-          <a:bodyPr wrap="square">
+          <a:bodyPr wrap="square" lIns="0" rIns="0" tIns="0" bIns="0">
             <a:spAutoFit/>
           </a:bodyPr>
           <a:lstStyle/>
           <a:p>
             <a:pPr>
+              <a:lnSpc>
+                <a:spcPct val="100000"/>
+              </a:lnSpc>
+              <a:spcBef>
+                <a:spcPts val="0"/>
+              </a:spcBef>
               <a:spcAft>
-                <a:spcPts val="800"/>
+                <a:spcPts val="0"/>
               </a:spcAft>
             </a:pPr>
             <a:r>
-              <a:rPr sz="3000" b="1" i="0">
-                <a:solidFill>
-                  <a:srgbClr val="1E3A8A"/>
-                </a:solidFill>
+              <a:rPr sz="3100" b="1" i="0">
+                <a:solidFill>
+                  <a:srgbClr val="2A1E33"/>
+                </a:solidFill>
+                <a:latin typeface="Noto Sans"/>
               </a:rPr>
               <a:t>Puncak Serentak 13 Oktober 2026</a:t>
             </a:r>
@@ -4665,24 +7101,27 @@
       </p:sp>
       <p:sp>
         <p:nvSpPr>
-          <p:cNvPr id="3" name="Rectangle 2"/>
+          <p:cNvPr id="3" name="Rounded Rectangle 2"/>
           <p:cNvSpPr/>
           <p:nvPr/>
         </p:nvSpPr>
         <p:spPr>
           <a:xfrm>
-            <a:off x="640080" y="1051560"/>
-            <a:ext cx="1371600" cy="54864"/>
-          </a:xfrm>
-          <a:prstGeom prst="rect">
-            <a:avLst/>
+            <a:off x="521208" y="1097280"/>
+            <a:ext cx="777240" cy="82296"/>
+          </a:xfrm>
+          <a:prstGeom prst="roundRect">
+            <a:avLst>
+              <a:gd name="adj" fmla="val 50000"/>
+            </a:avLst>
           </a:prstGeom>
           <a:solidFill>
-            <a:srgbClr val="0E7C7B"/>
+            <a:srgbClr val="EF7D1A"/>
           </a:solidFill>
           <a:ln>
             <a:noFill/>
           </a:ln>
+          <a:effectLst/>
         </p:spPr>
         <p:style>
           <a:lnRef idx="1">
@@ -4714,8 +7153,8 @@
         </p:nvSpPr>
         <p:spPr>
           <a:xfrm>
-            <a:off x="640080" y="1371600"/>
-            <a:ext cx="5120640" cy="4754880"/>
+            <a:off x="502920" y="1417320"/>
+            <a:ext cx="6720840" cy="2286000"/>
           </a:xfrm>
           <a:prstGeom prst="rect">
             <a:avLst/>
@@ -4723,72 +7162,316 @@
           <a:noFill/>
         </p:spPr>
         <p:txBody>
-          <a:bodyPr wrap="square">
+          <a:bodyPr wrap="square" lIns="0" rIns="0" tIns="0" bIns="0">
             <a:spAutoFit/>
           </a:bodyPr>
           <a:lstStyle/>
           <a:p>
-            <a:pPr marL="171450" indent="-171450">
+            <a:pPr marL="190500" indent="-190500">
+              <a:lnSpc>
+                <a:spcPct val="112000"/>
+              </a:lnSpc>
               <a:spcBef>
-                <a:spcPts val="200"/>
+                <a:spcPts val="0"/>
               </a:spcBef>
               <a:spcAft>
-                <a:spcPts val="1000"/>
+                <a:spcPts val="1100"/>
               </a:spcAft>
               <a:buChar char="•"/>
             </a:pPr>
             <a:r>
-              <a:rPr sz="1700" b="0" i="0">
-                <a:solidFill>
-                  <a:srgbClr val="1F2937"/>
-                </a:solidFill>
-              </a:rPr>
-              <a:t>Keempat kelompok mencapai titik tertinggi pada 13–14 Okt 2026: Beras Rp16.367, Daging Sapi Rp148.600, Minyak Goreng Rp22.850, Gula Pasir Rp19.950.</a:t>
-            </a:r>
-          </a:p>
-          <a:p>
-            <a:pPr marL="171450" indent="-171450">
+              <a:rPr sz="1500" b="0" i="0">
+                <a:solidFill>
+                  <a:srgbClr val="2A1E33"/>
+                </a:solidFill>
+                <a:latin typeface="Noto Sans"/>
+              </a:rPr>
+              <a:t/>
+            </a:r>
+            <a:r>
+              <a:rPr sz="1500">
+                <a:solidFill>
+                  <a:srgbClr val="2A1E33"/>
+                </a:solidFill>
+                <a:latin typeface="Noto Sans"/>
+              </a:rPr>
+              <a:t>Keempat kelompok mencapai titik tertinggi pada 13-14 Okt 2026: Beras Rp16.367, Daging Sapi Rp148.600, Minyak Goreng Rp22.850, Gula Pasir Rp19.950.</a:t>
+            </a:r>
+          </a:p>
+          <a:p>
+            <a:pPr marL="190500" indent="-190500">
+              <a:lnSpc>
+                <a:spcPct val="112000"/>
+              </a:lnSpc>
               <a:spcBef>
-                <a:spcPts val="200"/>
+                <a:spcPts val="0"/>
               </a:spcBef>
               <a:spcAft>
-                <a:spcPts val="1000"/>
+                <a:spcPts val="1100"/>
               </a:spcAft>
               <a:buChar char="•"/>
             </a:pPr>
             <a:r>
-              <a:rPr sz="1700" b="0" i="0">
-                <a:solidFill>
-                  <a:srgbClr val="1F2937"/>
-                </a:solidFill>
-              </a:rPr>
-              <a:t>Pola yang sama terlihat pada proyek Harga Cabai (puncak 12 Okt 2026) — ini lonjakan harga pangan luas, bukan ulah satu komoditas.</a:t>
-            </a:r>
-          </a:p>
-          <a:p>
-            <a:pPr marL="171450" indent="-171450">
+              <a:rPr sz="1500" b="0" i="0">
+                <a:solidFill>
+                  <a:srgbClr val="2A1E33"/>
+                </a:solidFill>
+                <a:latin typeface="Noto Sans"/>
+              </a:rPr>
+              <a:t/>
+            </a:r>
+            <a:r>
+              <a:rPr sz="1500">
+                <a:solidFill>
+                  <a:srgbClr val="2A1E33"/>
+                </a:solidFill>
+                <a:latin typeface="Noto Sans"/>
+              </a:rPr>
+              <a:t>Pola yang sama terlihat pada proyek Harga Cabai (puncak 12 Okt 2026), ini lonjakan harga pangan luas, bukan ulah satu komoditas.</a:t>
+            </a:r>
+          </a:p>
+          <a:p>
+            <a:pPr marL="190500" indent="-190500">
+              <a:lnSpc>
+                <a:spcPct val="112000"/>
+              </a:lnSpc>
               <a:spcBef>
-                <a:spcPts val="200"/>
+                <a:spcPts val="0"/>
               </a:spcBef>
               <a:spcAft>
-                <a:spcPts val="1000"/>
+                <a:spcPts val="1100"/>
               </a:spcAft>
               <a:buChar char="•"/>
             </a:pPr>
             <a:r>
-              <a:rPr sz="1700" b="0" i="0">
-                <a:solidFill>
-                  <a:srgbClr val="1F2937"/>
-                </a:solidFill>
+              <a:rPr sz="1500" b="0" i="0">
+                <a:solidFill>
+                  <a:srgbClr val="2A1E33"/>
+                </a:solidFill>
+                <a:latin typeface="Noto Sans"/>
+              </a:rPr>
+              <a:t/>
+            </a:r>
+            <a:r>
+              <a:rPr sz="1500">
+                <a:solidFill>
+                  <a:srgbClr val="2A1E33"/>
+                </a:solidFill>
+                <a:latin typeface="Noto Sans"/>
               </a:rPr>
               <a:t>Bagi pemantau kebijakan: minggu kedua Oktober 2026 adalah momen tekanan maksimum harga pangan tahun ini.</a:t>
             </a:r>
+          </a:p>
+        </p:txBody>
+      </p:sp>
+      <p:sp>
+        <p:nvSpPr>
+          <p:cNvPr id="5" name="Rounded Rectangle 4"/>
+          <p:cNvSpPr/>
+          <p:nvPr/>
+        </p:nvSpPr>
+        <p:spPr>
+          <a:xfrm>
+            <a:off x="7543800" y="1417320"/>
+            <a:ext cx="4142232" cy="2212848"/>
+          </a:xfrm>
+          <a:prstGeom prst="roundRect">
+            <a:avLst>
+              <a:gd name="adj" fmla="val 6611"/>
+            </a:avLst>
+          </a:prstGeom>
+          <a:solidFill>
+            <a:srgbClr val="EF7D1A"/>
+          </a:solidFill>
+          <a:ln>
+            <a:noFill/>
+          </a:ln>
+          <a:effectLst/>
+        </p:spPr>
+        <p:style>
+          <a:lnRef idx="1">
+            <a:schemeClr val="accent1"/>
+          </a:lnRef>
+          <a:fillRef idx="3">
+            <a:schemeClr val="accent1"/>
+          </a:fillRef>
+          <a:effectRef idx="2">
+            <a:schemeClr val="accent1"/>
+          </a:effectRef>
+          <a:fontRef idx="minor">
+            <a:schemeClr val="lt1"/>
+          </a:fontRef>
+        </p:style>
+        <p:txBody>
+          <a:bodyPr rtlCol="0" anchor="ctr"/>
+          <a:lstStyle/>
+          <a:p>
+            <a:pPr algn="ctr"/>
+          </a:p>
+        </p:txBody>
+      </p:sp>
+      <p:sp>
+        <p:nvSpPr>
+          <p:cNvPr id="6" name="TextBox 5"/>
+          <p:cNvSpPr txBox="1"/>
+          <p:nvPr/>
+        </p:nvSpPr>
+        <p:spPr>
+          <a:xfrm>
+            <a:off x="7863840" y="1691640"/>
+            <a:ext cx="3566160" cy="1737360"/>
+          </a:xfrm>
+          <a:prstGeom prst="rect">
+            <a:avLst/>
+          </a:prstGeom>
+          <a:noFill/>
+        </p:spPr>
+        <p:txBody>
+          <a:bodyPr wrap="square" lIns="0" rIns="0" tIns="0" bIns="0">
+            <a:spAutoFit/>
+          </a:bodyPr>
+          <a:lstStyle/>
+          <a:p>
+            <a:pPr>
+              <a:lnSpc>
+                <a:spcPct val="100000"/>
+              </a:lnSpc>
+              <a:spcBef>
+                <a:spcPts val="0"/>
+              </a:spcBef>
+              <a:spcAft>
+                <a:spcPts val="200"/>
+              </a:spcAft>
+            </a:pPr>
+            <a:r>
+              <a:rPr sz="3600" b="1" i="0">
+                <a:solidFill>
+                  <a:srgbClr val="FFFFFF"/>
+                </a:solidFill>
+                <a:latin typeface="Noto Sans"/>
+              </a:rPr>
+              <a:t>13 Okt 2026</a:t>
+            </a:r>
+          </a:p>
+          <a:p>
+            <a:pPr>
+              <a:lnSpc>
+                <a:spcPct val="110000"/>
+              </a:lnSpc>
+              <a:spcBef>
+                <a:spcPts val="0"/>
+              </a:spcBef>
+              <a:spcAft>
+                <a:spcPts val="0"/>
+              </a:spcAft>
+            </a:pPr>
+            <a:r>
+              <a:rPr sz="1300" b="0" i="0">
+                <a:solidFill>
+                  <a:srgbClr val="FFFFFF"/>
+                </a:solidFill>
+                <a:latin typeface="Noto Sans"/>
+              </a:rPr>
+              <a:t>keempat kelompok mencapai titik tertingginya pada 13-14 Oktober 2026</a:t>
+            </a:r>
+          </a:p>
+        </p:txBody>
+      </p:sp>
+      <p:sp>
+        <p:nvSpPr>
+          <p:cNvPr id="7" name="Rounded Rectangle 6"/>
+          <p:cNvSpPr/>
+          <p:nvPr/>
+        </p:nvSpPr>
+        <p:spPr>
+          <a:xfrm>
+            <a:off x="502920" y="3840480"/>
+            <a:ext cx="8503920" cy="2606040"/>
+          </a:xfrm>
+          <a:prstGeom prst="roundRect">
+            <a:avLst>
+              <a:gd name="adj" fmla="val 8771"/>
+            </a:avLst>
+          </a:prstGeom>
+          <a:solidFill>
+            <a:srgbClr val="DDCFB4"/>
+          </a:solidFill>
+          <a:ln>
+            <a:noFill/>
+          </a:ln>
+          <a:effectLst/>
+        </p:spPr>
+        <p:style>
+          <a:lnRef idx="1">
+            <a:schemeClr val="accent1"/>
+          </a:lnRef>
+          <a:fillRef idx="3">
+            <a:schemeClr val="accent1"/>
+          </a:fillRef>
+          <a:effectRef idx="2">
+            <a:schemeClr val="accent1"/>
+          </a:effectRef>
+          <a:fontRef idx="minor">
+            <a:schemeClr val="lt1"/>
+          </a:fontRef>
+        </p:style>
+        <p:txBody>
+          <a:bodyPr rtlCol="0" anchor="ctr"/>
+          <a:lstStyle/>
+          <a:p>
+            <a:pPr algn="ctr"/>
+          </a:p>
+        </p:txBody>
+      </p:sp>
+      <p:sp>
+        <p:nvSpPr>
+          <p:cNvPr id="8" name="Rounded Rectangle 7"/>
+          <p:cNvSpPr/>
+          <p:nvPr/>
+        </p:nvSpPr>
+        <p:spPr>
+          <a:xfrm>
+            <a:off x="566928" y="3904488"/>
+            <a:ext cx="8375904" cy="2478024"/>
+          </a:xfrm>
+          <a:prstGeom prst="roundRect">
+            <a:avLst>
+              <a:gd name="adj" fmla="val 6642"/>
+            </a:avLst>
+          </a:prstGeom>
+          <a:solidFill>
+            <a:srgbClr val="F8F2E4"/>
+          </a:solidFill>
+          <a:ln>
+            <a:noFill/>
+          </a:ln>
+          <a:effectLst/>
+        </p:spPr>
+        <p:style>
+          <a:lnRef idx="1">
+            <a:schemeClr val="accent1"/>
+          </a:lnRef>
+          <a:fillRef idx="3">
+            <a:schemeClr val="accent1"/>
+          </a:fillRef>
+          <a:effectRef idx="2">
+            <a:schemeClr val="accent1"/>
+          </a:effectRef>
+          <a:fontRef idx="minor">
+            <a:schemeClr val="lt1"/>
+          </a:fontRef>
+        </p:style>
+        <p:txBody>
+          <a:bodyPr rtlCol="0" anchor="ctr"/>
+          <a:lstStyle/>
+          <a:p>
+            <a:pPr algn="ctr"/>
           </a:p>
         </p:txBody>
       </p:sp>
       <p:pic>
         <p:nvPicPr>
-          <p:cNvPr id="5" name="Picture 4" descr="04_puncak.png"/>
+          <p:cNvPr id="9" name="Picture 8" descr="04_puncak.png"/>
           <p:cNvPicPr>
             <a:picLocks noChangeAspect="1"/>
           </p:cNvPicPr>
@@ -4802,14 +7485,127 @@
         </p:blipFill>
         <p:spPr>
           <a:xfrm>
-            <a:off x="6217920" y="1371600"/>
-            <a:ext cx="5303520" cy="2681555"/>
+            <a:off x="2331720" y="3913632"/>
+            <a:ext cx="4846320" cy="2450387"/>
           </a:xfrm>
           <a:prstGeom prst="rect">
             <a:avLst/>
           </a:prstGeom>
         </p:spPr>
       </p:pic>
+      <p:sp>
+        <p:nvSpPr>
+          <p:cNvPr id="10" name="Rounded Rectangle 9"/>
+          <p:cNvSpPr/>
+          <p:nvPr/>
+        </p:nvSpPr>
+        <p:spPr>
+          <a:xfrm>
+            <a:off x="9326880" y="3840480"/>
+            <a:ext cx="2359152" cy="2606040"/>
+          </a:xfrm>
+          <a:prstGeom prst="roundRect">
+            <a:avLst>
+              <a:gd name="adj" fmla="val 6201"/>
+            </a:avLst>
+          </a:prstGeom>
+          <a:solidFill>
+            <a:srgbClr val="F8F2E4"/>
+          </a:solidFill>
+          <a:ln>
+            <a:noFill/>
+          </a:ln>
+          <a:effectLst/>
+        </p:spPr>
+        <p:style>
+          <a:lnRef idx="1">
+            <a:schemeClr val="accent1"/>
+          </a:lnRef>
+          <a:fillRef idx="3">
+            <a:schemeClr val="accent1"/>
+          </a:fillRef>
+          <a:effectRef idx="2">
+            <a:schemeClr val="accent1"/>
+          </a:effectRef>
+          <a:fontRef idx="minor">
+            <a:schemeClr val="lt1"/>
+          </a:fontRef>
+        </p:style>
+        <p:txBody>
+          <a:bodyPr rtlCol="0" anchor="ctr"/>
+          <a:lstStyle/>
+          <a:p>
+            <a:pPr algn="ctr"/>
+          </a:p>
+        </p:txBody>
+      </p:sp>
+      <p:sp>
+        <p:nvSpPr>
+          <p:cNvPr id="11" name="TextBox 10"/>
+          <p:cNvSpPr txBox="1"/>
+          <p:nvPr/>
+        </p:nvSpPr>
+        <p:spPr>
+          <a:xfrm>
+            <a:off x="9601200" y="4187952"/>
+            <a:ext cx="1828800" cy="1737360"/>
+          </a:xfrm>
+          <a:prstGeom prst="rect">
+            <a:avLst/>
+          </a:prstGeom>
+          <a:noFill/>
+        </p:spPr>
+        <p:txBody>
+          <a:bodyPr wrap="square" lIns="0" rIns="0" tIns="0" bIns="0">
+            <a:spAutoFit/>
+          </a:bodyPr>
+          <a:lstStyle/>
+          <a:p>
+            <a:pPr>
+              <a:lnSpc>
+                <a:spcPct val="100000"/>
+              </a:lnSpc>
+              <a:spcBef>
+                <a:spcPts val="0"/>
+              </a:spcBef>
+              <a:spcAft>
+                <a:spcPts val="400"/>
+              </a:spcAft>
+            </a:pPr>
+            <a:r>
+              <a:rPr sz="2000" b="1" i="0">
+                <a:solidFill>
+                  <a:srgbClr val="5E2A72"/>
+                </a:solidFill>
+                <a:latin typeface="Noto Sans"/>
+              </a:rPr>
+              <a:t>12 Okt 2026</a:t>
+            </a:r>
+          </a:p>
+          <a:p>
+            <a:pPr>
+              <a:lnSpc>
+                <a:spcPct val="120000"/>
+              </a:lnSpc>
+              <a:spcBef>
+                <a:spcPts val="0"/>
+              </a:spcBef>
+              <a:spcAft>
+                <a:spcPts val="0"/>
+              </a:spcAft>
+            </a:pPr>
+            <a:r>
+              <a:rPr sz="1250" b="0" i="0">
+                <a:solidFill>
+                  <a:srgbClr val="2A1E33"/>
+                </a:solidFill>
+                <a:latin typeface="Noto Sans"/>
+              </a:rPr>
+              <a:t>puncak Harga Cabai, pola lonjakan yang sama persis.</a:t>
+            </a:r>
+          </a:p>
+        </p:txBody>
+      </p:sp>
     </p:spTree>
   </p:cSld>
   <p:clrMapOvr>
@@ -4824,7 +7620,7 @@
     <p:bg>
       <p:bgPr>
         <a:solidFill>
-          <a:srgbClr val="FFFFFF"/>
+          <a:srgbClr val="F0E8D8"/>
         </a:solidFill>
         <a:effectLst/>
       </p:bgPr>
@@ -4844,8 +7640,8 @@
         </p:nvSpPr>
         <p:spPr>
           <a:xfrm>
-            <a:off x="640080" y="274320"/>
-            <a:ext cx="10881360" cy="822960"/>
+            <a:off x="502920" y="384048"/>
+            <a:ext cx="11155680" cy="914400"/>
           </a:xfrm>
           <a:prstGeom prst="rect">
             <a:avLst/>
@@ -4853,21 +7649,28 @@
           <a:noFill/>
         </p:spPr>
         <p:txBody>
-          <a:bodyPr wrap="square">
+          <a:bodyPr wrap="square" lIns="0" rIns="0" tIns="0" bIns="0">
             <a:spAutoFit/>
           </a:bodyPr>
           <a:lstStyle/>
           <a:p>
             <a:pPr>
+              <a:lnSpc>
+                <a:spcPct val="100000"/>
+              </a:lnSpc>
+              <a:spcBef>
+                <a:spcPts val="0"/>
+              </a:spcBef>
               <a:spcAft>
-                <a:spcPts val="800"/>
+                <a:spcPts val="0"/>
               </a:spcAft>
             </a:pPr>
             <a:r>
-              <a:rPr sz="3000" b="1" i="0">
-                <a:solidFill>
-                  <a:srgbClr val="1E3A8A"/>
-                </a:solidFill>
+              <a:rPr sz="3100" b="1" i="0">
+                <a:solidFill>
+                  <a:srgbClr val="2A1E33"/>
+                </a:solidFill>
+                <a:latin typeface="Noto Sans"/>
               </a:rPr>
               <a:t>Disparitas Antar Provinsi</a:t>
             </a:r>
@@ -4876,24 +7679,27 @@
       </p:sp>
       <p:sp>
         <p:nvSpPr>
-          <p:cNvPr id="3" name="Rectangle 2"/>
+          <p:cNvPr id="3" name="Rounded Rectangle 2"/>
           <p:cNvSpPr/>
           <p:nvPr/>
         </p:nvSpPr>
         <p:spPr>
           <a:xfrm>
-            <a:off x="640080" y="1051560"/>
-            <a:ext cx="1371600" cy="54864"/>
-          </a:xfrm>
-          <a:prstGeom prst="rect">
-            <a:avLst/>
+            <a:off x="521208" y="1097280"/>
+            <a:ext cx="777240" cy="82296"/>
+          </a:xfrm>
+          <a:prstGeom prst="roundRect">
+            <a:avLst>
+              <a:gd name="adj" fmla="val 50000"/>
+            </a:avLst>
           </a:prstGeom>
           <a:solidFill>
-            <a:srgbClr val="0E7C7B"/>
+            <a:srgbClr val="EF7D1A"/>
           </a:solidFill>
           <a:ln>
             <a:noFill/>
           </a:ln>
+          <a:effectLst/>
         </p:spPr>
         <p:style>
           <a:lnRef idx="1">
@@ -4925,8 +7731,8 @@
         </p:nvSpPr>
         <p:spPr>
           <a:xfrm>
-            <a:off x="640080" y="1371600"/>
-            <a:ext cx="5120640" cy="4754880"/>
+            <a:off x="502920" y="1463040"/>
+            <a:ext cx="5486400" cy="3794760"/>
           </a:xfrm>
           <a:prstGeom prst="rect">
             <a:avLst/>
@@ -4934,91 +7740,326 @@
           <a:noFill/>
         </p:spPr>
         <p:txBody>
-          <a:bodyPr wrap="square">
+          <a:bodyPr wrap="square" lIns="0" rIns="0" tIns="0" bIns="0">
             <a:spAutoFit/>
           </a:bodyPr>
           <a:lstStyle/>
           <a:p>
-            <a:pPr marL="171450" indent="-171450">
+            <a:pPr marL="190500" indent="-190500">
+              <a:lnSpc>
+                <a:spcPct val="112000"/>
+              </a:lnSpc>
               <a:spcBef>
-                <a:spcPts val="200"/>
+                <a:spcPts val="0"/>
               </a:spcBef>
               <a:spcAft>
-                <a:spcPts val="1000"/>
+                <a:spcPts val="1100"/>
               </a:spcAft>
               <a:buChar char="•"/>
             </a:pPr>
             <a:r>
-              <a:rPr sz="1700" b="0" i="0">
-                <a:solidFill>
-                  <a:srgbClr val="1F2937"/>
-                </a:solidFill>
-              </a:rPr>
-              <a:t>Beras: Nusa Tenggara Barat Rp13.622/kg vs Kalimantan Tengah Rp19.094/kg — selisih 40.2%.</a:t>
-            </a:r>
-          </a:p>
-          <a:p>
-            <a:pPr marL="171450" indent="-171450">
+              <a:rPr sz="1500" b="0" i="0">
+                <a:solidFill>
+                  <a:srgbClr val="2A1E33"/>
+                </a:solidFill>
+                <a:latin typeface="Noto Sans"/>
+              </a:rPr>
+              <a:t/>
+            </a:r>
+            <a:r>
+              <a:rPr sz="1500">
+                <a:solidFill>
+                  <a:srgbClr val="2A1E33"/>
+                </a:solidFill>
+                <a:latin typeface="Noto Sans"/>
+              </a:rPr>
+              <a:t>Beras: Nusa Tenggara Barat Rp13.622/kg vs Kalimantan Tengah Rp19.094/kg, selisih 40.2%.</a:t>
+            </a:r>
+          </a:p>
+          <a:p>
+            <a:pPr marL="190500" indent="-190500">
+              <a:lnSpc>
+                <a:spcPct val="112000"/>
+              </a:lnSpc>
               <a:spcBef>
-                <a:spcPts val="200"/>
+                <a:spcPts val="0"/>
               </a:spcBef>
               <a:spcAft>
-                <a:spcPts val="1000"/>
+                <a:spcPts val="1100"/>
               </a:spcAft>
               <a:buChar char="•"/>
             </a:pPr>
             <a:r>
-              <a:rPr sz="1700" b="0" i="0">
-                <a:solidFill>
-                  <a:srgbClr val="1F2937"/>
-                </a:solidFill>
-              </a:rPr>
-              <a:t>Daging Sapi: Nusa Tenggara Timur Rp117.522/kg vs Kalimantan Selatan Rp165.463/kg — selisih 40.8%.</a:t>
-            </a:r>
-          </a:p>
-          <a:p>
-            <a:pPr marL="171450" indent="-171450">
+              <a:rPr sz="1500" b="0" i="0">
+                <a:solidFill>
+                  <a:srgbClr val="2A1E33"/>
+                </a:solidFill>
+                <a:latin typeface="Noto Sans"/>
+              </a:rPr>
+              <a:t/>
+            </a:r>
+            <a:r>
+              <a:rPr sz="1500">
+                <a:solidFill>
+                  <a:srgbClr val="2A1E33"/>
+                </a:solidFill>
+                <a:latin typeface="Noto Sans"/>
+              </a:rPr>
+              <a:t>Daging Sapi: Nusa Tenggara Timur Rp117.522/kg vs Kalimantan Selatan Rp165.463/kg, selisih 40.8%.</a:t>
+            </a:r>
+          </a:p>
+          <a:p>
+            <a:pPr marL="190500" indent="-190500">
+              <a:lnSpc>
+                <a:spcPct val="112000"/>
+              </a:lnSpc>
               <a:spcBef>
-                <a:spcPts val="200"/>
+                <a:spcPts val="0"/>
               </a:spcBef>
               <a:spcAft>
-                <a:spcPts val="1000"/>
+                <a:spcPts val="1100"/>
               </a:spcAft>
               <a:buChar char="•"/>
             </a:pPr>
             <a:r>
-              <a:rPr sz="1700" b="0" i="0">
-                <a:solidFill>
-                  <a:srgbClr val="1F2937"/>
-                </a:solidFill>
+              <a:rPr sz="1500" b="0" i="0">
+                <a:solidFill>
+                  <a:srgbClr val="2A1E33"/>
+                </a:solidFill>
+                <a:latin typeface="Noto Sans"/>
+              </a:rPr>
+              <a:t/>
+            </a:r>
+            <a:r>
+              <a:rPr sz="1500">
+                <a:solidFill>
+                  <a:srgbClr val="2A1E33"/>
+                </a:solidFill>
+                <a:latin typeface="Noto Sans"/>
               </a:rPr>
               <a:t>Minyak Goreng: Kepulauan Riau vs Gorontalo (selisih 36.3%); Gula Pasir: Sulawesi Selatan vs Papua (selisih 37.1%).</a:t>
             </a:r>
           </a:p>
           <a:p>
-            <a:pPr marL="171450" indent="-171450">
+            <a:pPr marL="190500" indent="-190500">
+              <a:lnSpc>
+                <a:spcPct val="112000"/>
+              </a:lnSpc>
               <a:spcBef>
-                <a:spcPts val="200"/>
+                <a:spcPts val="0"/>
               </a:spcBef>
               <a:spcAft>
-                <a:spcPts val="1000"/>
+                <a:spcPts val="1100"/>
               </a:spcAft>
               <a:buChar char="•"/>
             </a:pPr>
             <a:r>
-              <a:rPr sz="1700" b="0" i="0">
-                <a:solidFill>
-                  <a:srgbClr val="1F2937"/>
-                </a:solidFill>
-              </a:rPr>
-              <a:t>Pola konsisten: provinsi timur dan kepulauan membayar 36–41% lebih mahal — logistik dan rantai pasok adalah bagian dari masalah harga.</a:t>
-            </a:r>
+              <a:rPr sz="1500" b="0" i="0">
+                <a:solidFill>
+                  <a:srgbClr val="2A1E33"/>
+                </a:solidFill>
+                <a:latin typeface="Noto Sans"/>
+              </a:rPr>
+              <a:t/>
+            </a:r>
+            <a:r>
+              <a:rPr sz="1500">
+                <a:solidFill>
+                  <a:srgbClr val="2A1E33"/>
+                </a:solidFill>
+                <a:latin typeface="Noto Sans"/>
+              </a:rPr>
+              <a:t>Pola konsisten: provinsi timur dan kepulauan membayar 36-41% lebih mahal, logistik dan rantai pasok adalah bagian dari masalah harga.</a:t>
+            </a:r>
+          </a:p>
+        </p:txBody>
+      </p:sp>
+      <p:sp>
+        <p:nvSpPr>
+          <p:cNvPr id="5" name="Rounded Rectangle 4"/>
+          <p:cNvSpPr/>
+          <p:nvPr/>
+        </p:nvSpPr>
+        <p:spPr>
+          <a:xfrm>
+            <a:off x="502920" y="5440680"/>
+            <a:ext cx="5486400" cy="914400"/>
+          </a:xfrm>
+          <a:prstGeom prst="roundRect">
+            <a:avLst>
+              <a:gd name="adj" fmla="val 14000"/>
+            </a:avLst>
+          </a:prstGeom>
+          <a:solidFill>
+            <a:srgbClr val="5E2A72"/>
+          </a:solidFill>
+          <a:ln>
+            <a:noFill/>
+          </a:ln>
+          <a:effectLst/>
+        </p:spPr>
+        <p:style>
+          <a:lnRef idx="1">
+            <a:schemeClr val="accent1"/>
+          </a:lnRef>
+          <a:fillRef idx="3">
+            <a:schemeClr val="accent1"/>
+          </a:fillRef>
+          <a:effectRef idx="2">
+            <a:schemeClr val="accent1"/>
+          </a:effectRef>
+          <a:fontRef idx="minor">
+            <a:schemeClr val="lt1"/>
+          </a:fontRef>
+        </p:style>
+        <p:txBody>
+          <a:bodyPr rtlCol="0" anchor="ctr"/>
+          <a:lstStyle/>
+          <a:p>
+            <a:pPr algn="ctr"/>
+          </a:p>
+        </p:txBody>
+      </p:sp>
+      <p:sp>
+        <p:nvSpPr>
+          <p:cNvPr id="6" name="TextBox 5"/>
+          <p:cNvSpPr txBox="1"/>
+          <p:nvPr/>
+        </p:nvSpPr>
+        <p:spPr>
+          <a:xfrm>
+            <a:off x="777240" y="5641848"/>
+            <a:ext cx="5029200" cy="548640"/>
+          </a:xfrm>
+          <a:prstGeom prst="rect">
+            <a:avLst/>
+          </a:prstGeom>
+          <a:noFill/>
+        </p:spPr>
+        <p:txBody>
+          <a:bodyPr wrap="square" lIns="0" rIns="0" tIns="0" bIns="0">
+            <a:spAutoFit/>
+          </a:bodyPr>
+          <a:lstStyle/>
+          <a:p>
+            <a:pPr>
+              <a:lnSpc>
+                <a:spcPct val="100000"/>
+              </a:lnSpc>
+              <a:spcBef>
+                <a:spcPts val="0"/>
+              </a:spcBef>
+              <a:spcAft>
+                <a:spcPts val="0"/>
+              </a:spcAft>
+            </a:pPr>
+            <a:r>
+              <a:rPr sz="1450" b="1" i="0">
+                <a:solidFill>
+                  <a:srgbClr val="F8F2E4"/>
+                </a:solidFill>
+                <a:latin typeface="Noto Sans"/>
+              </a:rPr>
+              <a:t>Selisih termurah vs termahal: 36-41% di semua kelompok</a:t>
+            </a:r>
+          </a:p>
+        </p:txBody>
+      </p:sp>
+      <p:sp>
+        <p:nvSpPr>
+          <p:cNvPr id="7" name="Rounded Rectangle 6"/>
+          <p:cNvSpPr/>
+          <p:nvPr/>
+        </p:nvSpPr>
+        <p:spPr>
+          <a:xfrm>
+            <a:off x="6309360" y="1417320"/>
+            <a:ext cx="5376672" cy="4937760"/>
+          </a:xfrm>
+          <a:prstGeom prst="roundRect">
+            <a:avLst>
+              <a:gd name="adj" fmla="val 4629"/>
+            </a:avLst>
+          </a:prstGeom>
+          <a:solidFill>
+            <a:srgbClr val="DDCFB4"/>
+          </a:solidFill>
+          <a:ln>
+            <a:noFill/>
+          </a:ln>
+          <a:effectLst/>
+        </p:spPr>
+        <p:style>
+          <a:lnRef idx="1">
+            <a:schemeClr val="accent1"/>
+          </a:lnRef>
+          <a:fillRef idx="3">
+            <a:schemeClr val="accent1"/>
+          </a:fillRef>
+          <a:effectRef idx="2">
+            <a:schemeClr val="accent1"/>
+          </a:effectRef>
+          <a:fontRef idx="minor">
+            <a:schemeClr val="lt1"/>
+          </a:fontRef>
+        </p:style>
+        <p:txBody>
+          <a:bodyPr rtlCol="0" anchor="ctr"/>
+          <a:lstStyle/>
+          <a:p>
+            <a:pPr algn="ctr"/>
+          </a:p>
+        </p:txBody>
+      </p:sp>
+      <p:sp>
+        <p:nvSpPr>
+          <p:cNvPr id="8" name="Rounded Rectangle 7"/>
+          <p:cNvSpPr/>
+          <p:nvPr/>
+        </p:nvSpPr>
+        <p:spPr>
+          <a:xfrm>
+            <a:off x="6373368" y="1481328"/>
+            <a:ext cx="5248656" cy="4809744"/>
+          </a:xfrm>
+          <a:prstGeom prst="roundRect">
+            <a:avLst>
+              <a:gd name="adj" fmla="val 3422"/>
+            </a:avLst>
+          </a:prstGeom>
+          <a:solidFill>
+            <a:srgbClr val="F8F2E4"/>
+          </a:solidFill>
+          <a:ln>
+            <a:noFill/>
+          </a:ln>
+          <a:effectLst/>
+        </p:spPr>
+        <p:style>
+          <a:lnRef idx="1">
+            <a:schemeClr val="accent1"/>
+          </a:lnRef>
+          <a:fillRef idx="3">
+            <a:schemeClr val="accent1"/>
+          </a:fillRef>
+          <a:effectRef idx="2">
+            <a:schemeClr val="accent1"/>
+          </a:effectRef>
+          <a:fontRef idx="minor">
+            <a:schemeClr val="lt1"/>
+          </a:fontRef>
+        </p:style>
+        <p:txBody>
+          <a:bodyPr rtlCol="0" anchor="ctr"/>
+          <a:lstStyle/>
+          <a:p>
+            <a:pPr algn="ctr"/>
           </a:p>
         </p:txBody>
       </p:sp>
       <p:pic>
         <p:nvPicPr>
-          <p:cNvPr id="5" name="Picture 4" descr="05_disparitas_provinsi.png"/>
+          <p:cNvPr id="9" name="Picture 8" descr="05_disparitas_provinsi.png"/>
           <p:cNvPicPr>
             <a:picLocks noChangeAspect="1"/>
           </p:cNvPicPr>
@@ -5032,8 +8073,8 @@
         </p:blipFill>
         <p:spPr>
           <a:xfrm>
-            <a:off x="6217920" y="1371600"/>
-            <a:ext cx="5303520" cy="3348253"/>
+            <a:off x="6601968" y="1709928"/>
+            <a:ext cx="4800600" cy="3186953"/>
           </a:xfrm>
           <a:prstGeom prst="rect">
             <a:avLst/>
@@ -5054,7 +8095,7 @@
     <p:bg>
       <p:bgPr>
         <a:solidFill>
-          <a:srgbClr val="FFFFFF"/>
+          <a:srgbClr val="F0E8D8"/>
         </a:solidFill>
         <a:effectLst/>
       </p:bgPr>
@@ -5074,8 +8115,8 @@
         </p:nvSpPr>
         <p:spPr>
           <a:xfrm>
-            <a:off x="640080" y="274320"/>
-            <a:ext cx="10881360" cy="822960"/>
+            <a:off x="502920" y="384048"/>
+            <a:ext cx="11155680" cy="914400"/>
           </a:xfrm>
           <a:prstGeom prst="rect">
             <a:avLst/>
@@ -5083,21 +8124,28 @@
           <a:noFill/>
         </p:spPr>
         <p:txBody>
-          <a:bodyPr wrap="square">
+          <a:bodyPr wrap="square" lIns="0" rIns="0" tIns="0" bIns="0">
             <a:spAutoFit/>
           </a:bodyPr>
           <a:lstStyle/>
           <a:p>
             <a:pPr>
+              <a:lnSpc>
+                <a:spcPct val="100000"/>
+              </a:lnSpc>
+              <a:spcBef>
+                <a:spcPts val="0"/>
+              </a:spcBef>
               <a:spcAft>
-                <a:spcPts val="800"/>
+                <a:spcPts val="0"/>
               </a:spcAft>
             </a:pPr>
             <a:r>
-              <a:rPr sz="3000" b="1" i="0">
-                <a:solidFill>
-                  <a:srgbClr val="1E3A8A"/>
-                </a:solidFill>
+              <a:rPr sz="3100" b="1" i="0">
+                <a:solidFill>
+                  <a:srgbClr val="2A1E33"/>
+                </a:solidFill>
+                <a:latin typeface="Noto Sans"/>
               </a:rPr>
               <a:t>Apakah Ramadan Mendongkrak Harga?</a:t>
             </a:r>
@@ -5106,24 +8154,27 @@
       </p:sp>
       <p:sp>
         <p:nvSpPr>
-          <p:cNvPr id="3" name="Rectangle 2"/>
+          <p:cNvPr id="3" name="Rounded Rectangle 2"/>
           <p:cNvSpPr/>
           <p:nvPr/>
         </p:nvSpPr>
         <p:spPr>
           <a:xfrm>
-            <a:off x="640080" y="1051560"/>
-            <a:ext cx="1371600" cy="54864"/>
-          </a:xfrm>
-          <a:prstGeom prst="rect">
-            <a:avLst/>
+            <a:off x="521208" y="1097280"/>
+            <a:ext cx="777240" cy="82296"/>
+          </a:xfrm>
+          <a:prstGeom prst="roundRect">
+            <a:avLst>
+              <a:gd name="adj" fmla="val 50000"/>
+            </a:avLst>
           </a:prstGeom>
           <a:solidFill>
-            <a:srgbClr val="0E7C7B"/>
+            <a:srgbClr val="EF7D1A"/>
           </a:solidFill>
           <a:ln>
             <a:noFill/>
           </a:ln>
+          <a:effectLst/>
         </p:spPr>
         <p:style>
           <a:lnRef idx="1">
@@ -5149,106 +8200,99 @@
       </p:sp>
       <p:sp>
         <p:nvSpPr>
-          <p:cNvPr id="4" name="TextBox 3"/>
-          <p:cNvSpPr txBox="1"/>
-          <p:nvPr/>
-        </p:nvSpPr>
-        <p:spPr>
-          <a:xfrm>
-            <a:off x="640080" y="1371600"/>
-            <a:ext cx="5120640" cy="4754880"/>
-          </a:xfrm>
-          <a:prstGeom prst="rect">
-            <a:avLst/>
-          </a:prstGeom>
-          <a:noFill/>
-        </p:spPr>
-        <p:txBody>
-          <a:bodyPr wrap="square">
-            <a:spAutoFit/>
-          </a:bodyPr>
-          <a:lstStyle/>
-          <a:p>
-            <a:pPr marL="171450" indent="-171450">
-              <a:spcBef>
-                <a:spcPts val="200"/>
-              </a:spcBef>
-              <a:spcAft>
-                <a:spcPts val="1000"/>
-              </a:spcAft>
-              <a:buChar char="•"/>
-            </a:pPr>
-            <a:r>
-              <a:rPr sz="1700" b="0" i="0">
-                <a:solidFill>
-                  <a:srgbClr val="1F2937"/>
-                </a:solidFill>
-              </a:rPr>
-              <a:t>Ramadan 2025: beras Rp15.194/kg (30 hari sebelum) → Rp15.229/kg (selama) → Rp15.266/kg (30 hari sesudah).</a:t>
-            </a:r>
-          </a:p>
-          <a:p>
-            <a:pPr marL="171450" indent="-171450">
-              <a:spcBef>
-                <a:spcPts val="200"/>
-              </a:spcBef>
-              <a:spcAft>
-                <a:spcPts val="1000"/>
-              </a:spcAft>
-              <a:buChar char="•"/>
-            </a:pPr>
-            <a:r>
-              <a:rPr sz="1700" b="0" i="0">
-                <a:solidFill>
-                  <a:srgbClr val="1F2937"/>
-                </a:solidFill>
-              </a:rPr>
-              <a:t>Ramadan 2026: Rp15.711/kg → Rp15.767/kg → Rp15.837/kg.</a:t>
-            </a:r>
-          </a:p>
-          <a:p>
-            <a:pPr marL="171450" indent="-171450">
-              <a:spcBef>
-                <a:spcPts val="200"/>
-              </a:spcBef>
-              <a:spcAft>
-                <a:spcPts val="1000"/>
-              </a:spcAft>
-              <a:buChar char="•"/>
-            </a:pPr>
-            <a:r>
-              <a:rPr sz="1700" b="0" i="0">
-                <a:solidFill>
-                  <a:srgbClr val="1F2937"/>
-                </a:solidFill>
-              </a:rPr>
-              <a:t>Kenaikan selama Ramadan hanya 0,2–0,4% — kecil. Narasi 'harga selalu melonjak saat puasa' tidak terbukti pada data 2025–2026 untuk beras.</a:t>
-            </a:r>
-          </a:p>
-          <a:p>
-            <a:pPr marL="171450" indent="-171450">
-              <a:spcBef>
-                <a:spcPts val="200"/>
-              </a:spcBef>
-              <a:spcAft>
-                <a:spcPts val="1000"/>
-              </a:spcAft>
-              <a:buChar char="•"/>
-            </a:pPr>
-            <a:r>
-              <a:rPr sz="1700" b="0" i="0">
-                <a:solidFill>
-                  <a:srgbClr val="1F2937"/>
-                </a:solidFill>
-              </a:rPr>
-              <a:t>Tekanan harga yang sesungguhnya terjadi di luar musim Ramadan: tren naik jangka panjang + lonjakan Oktober 2026.</a:t>
-            </a:r>
+          <p:cNvPr id="4" name="Rounded Rectangle 3"/>
+          <p:cNvSpPr/>
+          <p:nvPr/>
+        </p:nvSpPr>
+        <p:spPr>
+          <a:xfrm>
+            <a:off x="502920" y="1417320"/>
+            <a:ext cx="5376672" cy="4937760"/>
+          </a:xfrm>
+          <a:prstGeom prst="roundRect">
+            <a:avLst>
+              <a:gd name="adj" fmla="val 4629"/>
+            </a:avLst>
+          </a:prstGeom>
+          <a:solidFill>
+            <a:srgbClr val="DDCFB4"/>
+          </a:solidFill>
+          <a:ln>
+            <a:noFill/>
+          </a:ln>
+          <a:effectLst/>
+        </p:spPr>
+        <p:style>
+          <a:lnRef idx="1">
+            <a:schemeClr val="accent1"/>
+          </a:lnRef>
+          <a:fillRef idx="3">
+            <a:schemeClr val="accent1"/>
+          </a:fillRef>
+          <a:effectRef idx="2">
+            <a:schemeClr val="accent1"/>
+          </a:effectRef>
+          <a:fontRef idx="minor">
+            <a:schemeClr val="lt1"/>
+          </a:fontRef>
+        </p:style>
+        <p:txBody>
+          <a:bodyPr rtlCol="0" anchor="ctr"/>
+          <a:lstStyle/>
+          <a:p>
+            <a:pPr algn="ctr"/>
+          </a:p>
+        </p:txBody>
+      </p:sp>
+      <p:sp>
+        <p:nvSpPr>
+          <p:cNvPr id="5" name="Rounded Rectangle 4"/>
+          <p:cNvSpPr/>
+          <p:nvPr/>
+        </p:nvSpPr>
+        <p:spPr>
+          <a:xfrm>
+            <a:off x="566928" y="1481328"/>
+            <a:ext cx="5248656" cy="4809744"/>
+          </a:xfrm>
+          <a:prstGeom prst="roundRect">
+            <a:avLst>
+              <a:gd name="adj" fmla="val 3422"/>
+            </a:avLst>
+          </a:prstGeom>
+          <a:solidFill>
+            <a:srgbClr val="F8F2E4"/>
+          </a:solidFill>
+          <a:ln>
+            <a:noFill/>
+          </a:ln>
+          <a:effectLst/>
+        </p:spPr>
+        <p:style>
+          <a:lnRef idx="1">
+            <a:schemeClr val="accent1"/>
+          </a:lnRef>
+          <a:fillRef idx="3">
+            <a:schemeClr val="accent1"/>
+          </a:fillRef>
+          <a:effectRef idx="2">
+            <a:schemeClr val="accent1"/>
+          </a:effectRef>
+          <a:fontRef idx="minor">
+            <a:schemeClr val="lt1"/>
+          </a:fontRef>
+        </p:style>
+        <p:txBody>
+          <a:bodyPr rtlCol="0" anchor="ctr"/>
+          <a:lstStyle/>
+          <a:p>
+            <a:pPr algn="ctr"/>
           </a:p>
         </p:txBody>
       </p:sp>
       <p:pic>
         <p:nvPicPr>
-          <p:cNvPr id="5" name="Picture 4" descr="06_ramadan.png"/>
+          <p:cNvPr id="6" name="Picture 5" descr="06_ramadan.png"/>
           <p:cNvPicPr>
             <a:picLocks noChangeAspect="1"/>
           </p:cNvPicPr>
@@ -5262,14 +8306,256 @@
         </p:blipFill>
         <p:spPr>
           <a:xfrm>
-            <a:off x="6217920" y="1371600"/>
-            <a:ext cx="5303520" cy="3520824"/>
+            <a:off x="795528" y="1709928"/>
+            <a:ext cx="4800600" cy="3186953"/>
           </a:xfrm>
           <a:prstGeom prst="rect">
             <a:avLst/>
           </a:prstGeom>
         </p:spPr>
       </p:pic>
+      <p:sp>
+        <p:nvSpPr>
+          <p:cNvPr id="7" name="TextBox 6"/>
+          <p:cNvSpPr txBox="1"/>
+          <p:nvPr/>
+        </p:nvSpPr>
+        <p:spPr>
+          <a:xfrm>
+            <a:off x="6263640" y="1463040"/>
+            <a:ext cx="5440680" cy="3794760"/>
+          </a:xfrm>
+          <a:prstGeom prst="rect">
+            <a:avLst/>
+          </a:prstGeom>
+          <a:noFill/>
+        </p:spPr>
+        <p:txBody>
+          <a:bodyPr wrap="square" lIns="0" rIns="0" tIns="0" bIns="0">
+            <a:spAutoFit/>
+          </a:bodyPr>
+          <a:lstStyle/>
+          <a:p>
+            <a:pPr marL="190500" indent="-190500">
+              <a:lnSpc>
+                <a:spcPct val="112000"/>
+              </a:lnSpc>
+              <a:spcBef>
+                <a:spcPts val="0"/>
+              </a:spcBef>
+              <a:spcAft>
+                <a:spcPts val="1100"/>
+              </a:spcAft>
+              <a:buChar char="•"/>
+            </a:pPr>
+            <a:r>
+              <a:rPr sz="1500" b="0" i="0">
+                <a:solidFill>
+                  <a:srgbClr val="2A1E33"/>
+                </a:solidFill>
+                <a:latin typeface="Noto Sans"/>
+              </a:rPr>
+              <a:t/>
+            </a:r>
+            <a:r>
+              <a:rPr sz="1500">
+                <a:solidFill>
+                  <a:srgbClr val="2A1E33"/>
+                </a:solidFill>
+                <a:latin typeface="Noto Sans"/>
+              </a:rPr>
+              <a:t>Ramadan 2025: beras Rp15.194/kg (30 hari sebelum), Rp15.229/kg (selama), Rp15.266/kg (30 hari sesudah).</a:t>
+            </a:r>
+          </a:p>
+          <a:p>
+            <a:pPr marL="190500" indent="-190500">
+              <a:lnSpc>
+                <a:spcPct val="112000"/>
+              </a:lnSpc>
+              <a:spcBef>
+                <a:spcPts val="0"/>
+              </a:spcBef>
+              <a:spcAft>
+                <a:spcPts val="1100"/>
+              </a:spcAft>
+              <a:buChar char="•"/>
+            </a:pPr>
+            <a:r>
+              <a:rPr sz="1500" b="0" i="0">
+                <a:solidFill>
+                  <a:srgbClr val="2A1E33"/>
+                </a:solidFill>
+                <a:latin typeface="Noto Sans"/>
+              </a:rPr>
+              <a:t/>
+            </a:r>
+            <a:r>
+              <a:rPr sz="1500">
+                <a:solidFill>
+                  <a:srgbClr val="2A1E33"/>
+                </a:solidFill>
+                <a:latin typeface="Noto Sans"/>
+              </a:rPr>
+              <a:t>Ramadan 2026: Rp15.711/kg, Rp15.767/kg, Rp15.837/kg.</a:t>
+            </a:r>
+          </a:p>
+          <a:p>
+            <a:pPr marL="190500" indent="-190500">
+              <a:lnSpc>
+                <a:spcPct val="112000"/>
+              </a:lnSpc>
+              <a:spcBef>
+                <a:spcPts val="0"/>
+              </a:spcBef>
+              <a:spcAft>
+                <a:spcPts val="1100"/>
+              </a:spcAft>
+              <a:buChar char="•"/>
+            </a:pPr>
+            <a:r>
+              <a:rPr sz="1500" b="0" i="0">
+                <a:solidFill>
+                  <a:srgbClr val="2A1E33"/>
+                </a:solidFill>
+                <a:latin typeface="Noto Sans"/>
+              </a:rPr>
+              <a:t/>
+            </a:r>
+            <a:r>
+              <a:rPr sz="1500">
+                <a:solidFill>
+                  <a:srgbClr val="2A1E33"/>
+                </a:solidFill>
+                <a:latin typeface="Noto Sans"/>
+              </a:rPr>
+              <a:t>Kenaikan selama Ramadan hanya 0,2-0,4%, kecil. Narasi 'harga selalu melonjak saat puasa' tidak terbukti pada data 2025-2026 untuk beras.</a:t>
+            </a:r>
+          </a:p>
+          <a:p>
+            <a:pPr marL="190500" indent="-190500">
+              <a:lnSpc>
+                <a:spcPct val="112000"/>
+              </a:lnSpc>
+              <a:spcBef>
+                <a:spcPts val="0"/>
+              </a:spcBef>
+              <a:spcAft>
+                <a:spcPts val="1100"/>
+              </a:spcAft>
+              <a:buChar char="•"/>
+            </a:pPr>
+            <a:r>
+              <a:rPr sz="1500" b="0" i="0">
+                <a:solidFill>
+                  <a:srgbClr val="2A1E33"/>
+                </a:solidFill>
+                <a:latin typeface="Noto Sans"/>
+              </a:rPr>
+              <a:t/>
+            </a:r>
+            <a:r>
+              <a:rPr sz="1500">
+                <a:solidFill>
+                  <a:srgbClr val="2A1E33"/>
+                </a:solidFill>
+                <a:latin typeface="Noto Sans"/>
+              </a:rPr>
+              <a:t>Tekanan harga yang sesungguhnya terjadi di luar musim Ramadan: tren naik jangka panjang + lonjakan Oktober 2026.</a:t>
+            </a:r>
+          </a:p>
+        </p:txBody>
+      </p:sp>
+      <p:sp>
+        <p:nvSpPr>
+          <p:cNvPr id="8" name="Rounded Rectangle 7"/>
+          <p:cNvSpPr/>
+          <p:nvPr/>
+        </p:nvSpPr>
+        <p:spPr>
+          <a:xfrm>
+            <a:off x="6263640" y="5440680"/>
+            <a:ext cx="5440680" cy="914400"/>
+          </a:xfrm>
+          <a:prstGeom prst="roundRect">
+            <a:avLst>
+              <a:gd name="adj" fmla="val 14000"/>
+            </a:avLst>
+          </a:prstGeom>
+          <a:solidFill>
+            <a:srgbClr val="EF7D1A"/>
+          </a:solidFill>
+          <a:ln>
+            <a:noFill/>
+          </a:ln>
+          <a:effectLst/>
+        </p:spPr>
+        <p:style>
+          <a:lnRef idx="1">
+            <a:schemeClr val="accent1"/>
+          </a:lnRef>
+          <a:fillRef idx="3">
+            <a:schemeClr val="accent1"/>
+          </a:fillRef>
+          <a:effectRef idx="2">
+            <a:schemeClr val="accent1"/>
+          </a:effectRef>
+          <a:fontRef idx="minor">
+            <a:schemeClr val="lt1"/>
+          </a:fontRef>
+        </p:style>
+        <p:txBody>
+          <a:bodyPr rtlCol="0" anchor="ctr"/>
+          <a:lstStyle/>
+          <a:p>
+            <a:pPr algn="ctr"/>
+          </a:p>
+        </p:txBody>
+      </p:sp>
+      <p:sp>
+        <p:nvSpPr>
+          <p:cNvPr id="9" name="TextBox 8"/>
+          <p:cNvSpPr txBox="1"/>
+          <p:nvPr/>
+        </p:nvSpPr>
+        <p:spPr>
+          <a:xfrm>
+            <a:off x="6537960" y="5641848"/>
+            <a:ext cx="4937760" cy="548640"/>
+          </a:xfrm>
+          <a:prstGeom prst="rect">
+            <a:avLst/>
+          </a:prstGeom>
+          <a:noFill/>
+        </p:spPr>
+        <p:txBody>
+          <a:bodyPr wrap="square" lIns="0" rIns="0" tIns="0" bIns="0">
+            <a:spAutoFit/>
+          </a:bodyPr>
+          <a:lstStyle/>
+          <a:p>
+            <a:pPr>
+              <a:lnSpc>
+                <a:spcPct val="100000"/>
+              </a:lnSpc>
+              <a:spcBef>
+                <a:spcPts val="0"/>
+              </a:spcBef>
+              <a:spcAft>
+                <a:spcPts val="0"/>
+              </a:spcAft>
+            </a:pPr>
+            <a:r>
+              <a:rPr sz="1450" b="1" i="0">
+                <a:solidFill>
+                  <a:srgbClr val="FFFFFF"/>
+                </a:solidFill>
+                <a:latin typeface="Noto Sans"/>
+              </a:rPr>
+              <a:t>Efek Ramadan pada beras: hanya +0,2-0,4%</a:t>
+            </a:r>
+          </a:p>
+        </p:txBody>
+      </p:sp>
     </p:spTree>
   </p:cSld>
   <p:clrMapOvr>

--- a/Portofolio-Analisis-Harga-Pangan.pptx
+++ b/Portofolio-Analisis-Harga-Pangan.pptx
@@ -3257,7 +3257,7 @@
                 </a:solidFill>
                 <a:latin typeface="Noto Sans"/>
               </a:rPr>
-              <a:t>Data harian PIHPS / Bank Indonesia: 13 komoditas, 34 provinsi, 1 Januari 2025 sampai 19 Oktober 2026.</a:t>
+              <a:t>Data harian PIHPS / Bank Indonesia: 13 komoditas, 34 provinsi, 1 Januari 2025 sampai 23 Oktober 2026.</a:t>
             </a:r>
           </a:p>
         </p:txBody>
@@ -3461,7 +3461,7 @@
                 </a:solidFill>
                 <a:latin typeface="Noto Sans"/>
               </a:rPr>
-              <a:t>+6,7%</a:t>
+              <a:t>+6,8%</a:t>
             </a:r>
           </a:p>
           <a:p>
@@ -3505,7 +3505,7 @@
                 </a:solidFill>
                 <a:latin typeface="Noto Sans"/>
               </a:rPr>
-              <a:t>Rata-rata Rp20.753 menjadi Rp22.146 per kg, tertinggi dari empat kelompok bahan pokok.</a:t>
+              <a:t>Rata-rata Rp20.753 menjadi Rp22.158 per kg, tertinggi dari empat kelompok bahan pokok.</a:t>
             </a:r>
           </a:p>
         </p:txBody>
@@ -3872,7 +3872,7 @@
                 </a:solidFill>
                 <a:latin typeface="Noto Sans"/>
               </a:rPr>
-              <a:t>(1) Minyak goreng naik tertinggi (+6,7%) dan paling liar, pantau curah; (2) 13 Okt 2026 adalah puncak tekanan harga pangan nasional; (3) disparitas 36-41% antarprovinsi menuntut perhatian logistik, bukan cuma produksi.</a:t>
+              <a:t>(1) Minyak goreng naik tertinggi (+6,8%) dan paling liar, pantau curah; (2) medio Okt 2026 adalah puncak tekanan harga pangan nasional; (3) disparitas 36-41% antarprovinsi menuntut perhatian logistik, bukan cuma produksi.</a:t>
             </a:r>
           </a:p>
         </p:txBody>
@@ -5208,7 +5208,7 @@
                 </a:solidFill>
                 <a:latin typeface="Noto Sans"/>
               </a:rPr>
-              <a:t>203.077</a:t>
+              <a:t>204.809</a:t>
             </a:r>
           </a:p>
           <a:p>
@@ -5321,7 +5321,7 @@
                 </a:solidFill>
                 <a:latin typeface="Noto Sans"/>
               </a:rPr>
-              <a:t>6.097</a:t>
+              <a:t>6.149</a:t>
             </a:r>
           </a:p>
           <a:p>
@@ -5490,7 +5490,7 @@
                 </a:solidFill>
                 <a:latin typeface="Noto Sans"/>
               </a:rPr>
-              <a:t>Data harian API PIHPS: 1 Jan 2025 - 19 Okt 2026 (469 hari laporan), 6.097 baris nasional + 203.077 baris provinsi.</a:t>
+              <a:t>Data harian API PIHPS: 1 Jan 2025 - 23 Okt 2026 (473 hari laporan), 6.149 baris nasional + 204.809 baris provinsi.</a:t>
             </a:r>
           </a:p>
           <a:p>
@@ -5758,7 +5758,7 @@
                 </a:solidFill>
                 <a:latin typeface="Noto Sans"/>
               </a:rPr>
-              <a:t>Minyak Goreng rata-rata 2026 Rp22.146/kg (+6.7% vs 2025): kenaikan tertinggi.</a:t>
+              <a:t>Minyak Goreng rata-rata 2026 Rp22.158/kg (+6.8% vs 2025): kenaikan tertinggi.</a:t>
             </a:r>
           </a:p>
           <a:p>
@@ -5790,7 +5790,7 @@
                 </a:solidFill>
                 <a:latin typeface="Noto Sans"/>
               </a:rPr>
-              <a:t>Daging Sapi Rp144.214/kg (+6.0%); Beras Rp15.983/kg (+3.0%); Gula Pasir Rp19.539/kg (+2.4%).</a:t>
+              <a:t>Daging Sapi Rp144.290/kg (+6.0%); Beras Rp15.990/kg (+3.1%); Gula Pasir Rp19.547/kg (+2.4%).</a:t>
             </a:r>
           </a:p>
           <a:p>
@@ -5913,7 +5913,7 @@
                 </a:solidFill>
                 <a:latin typeface="Noto Sans"/>
               </a:rPr>
-              <a:t>Rp22.146</a:t>
+              <a:t>Rp22.158</a:t>
             </a:r>
           </a:p>
           <a:p>
@@ -6339,7 +6339,7 @@
                 </a:solidFill>
                 <a:latin typeface="Noto Sans"/>
               </a:rPr>
-              <a:t>Minyak Goreng: +6.7%, juara kenaikan, didorong Minyak Goreng Curah (+7.3%).</a:t>
+              <a:t>Minyak Goreng: +6.8%, juara kenaikan, didorong Minyak Goreng Curah (+7.3%).</a:t>
             </a:r>
           </a:p>
           <a:p>
@@ -6371,7 +6371,7 @@
                 </a:solidFill>
                 <a:latin typeface="Noto Sans"/>
               </a:rPr>
-              <a:t>Daging Sapi: +6.0%, kedua tertinggi, harga rata-rata 2026 menembus Rp144.214/kg.</a:t>
+              <a:t>Daging Sapi: +6.0%, kedua tertinggi, harga rata-rata 2026 menembus Rp144.290/kg.</a:t>
             </a:r>
           </a:p>
           <a:p>
@@ -6403,7 +6403,7 @@
                 </a:solidFill>
                 <a:latin typeface="Noto Sans"/>
               </a:rPr>
-              <a:t>Beras: +3.0%, moderat tapi basisnya besar: Rp15.515 ke Rp15.983/kg.</a:t>
+              <a:t>Beras: +3.1%, moderat tapi basisnya besar: Rp15.515 ke Rp15.990/kg.</a:t>
             </a:r>
           </a:p>
           <a:p>
@@ -6526,7 +6526,7 @@
                 </a:solidFill>
                 <a:latin typeface="Noto Sans"/>
               </a:rPr>
-              <a:t>Kenaikan 2026 vs 2025:   Minyak Goreng +6,7%      Daging Sapi +6,0%      Beras +3,0%      Gula Pasir +2,4%</a:t>
+              <a:t>Kenaikan 2026 vs 2025:   Minyak Goreng +6,8%      Daging Sapi +6,0%      Beras +3,1%      Gula Pasir +2,4%</a:t>
             </a:r>
           </a:p>
         </p:txBody>
@@ -7195,7 +7195,7 @@
                 </a:solidFill>
                 <a:latin typeface="Noto Sans"/>
               </a:rPr>
-              <a:t>Keempat kelompok mencapai titik tertinggi pada 13-14 Okt 2026: Beras Rp16.367, Daging Sapi Rp148.600, Minyak Goreng Rp22.850, Gula Pasir Rp19.950.</a:t>
+              <a:t>Tiga kelompok mencapai titik tertinggi pada 13-14 Okt 2026: Beras Rp16.367, Daging Sapi Rp148.600, Minyak Goreng Rp22.850. Gula Pasir menyusul tipis melampaui puncaknya pada 21 Okt 2026: Rp20.000.</a:t>
             </a:r>
           </a:p>
           <a:p>
@@ -7372,7 +7372,7 @@
                 </a:solidFill>
                 <a:latin typeface="Noto Sans"/>
               </a:rPr>
-              <a:t>keempat kelompok mencapai titik tertingginya pada 13-14 Oktober 2026</a:t>
+              <a:t>tiga kelompok mencapai titik tertingginya pada 13-14 Oktober 2026; gula pasir menyusul tipis pada 21 Oktober 2026</a:t>
             </a:r>
           </a:p>
         </p:txBody>
@@ -7773,7 +7773,7 @@
                 </a:solidFill>
                 <a:latin typeface="Noto Sans"/>
               </a:rPr>
-              <a:t>Beras: Nusa Tenggara Barat Rp13.622/kg vs Kalimantan Tengah Rp19.094/kg, selisih 40.2%.</a:t>
+              <a:t>Beras: Nusa Tenggara Barat Rp13.621/kg vs Kalimantan Tengah Rp19.114/kg, selisih 40.3%.</a:t>
             </a:r>
           </a:p>
           <a:p>
@@ -7805,7 +7805,7 @@
                 </a:solidFill>
                 <a:latin typeface="Noto Sans"/>
               </a:rPr>
-              <a:t>Daging Sapi: Nusa Tenggara Timur Rp117.522/kg vs Kalimantan Selatan Rp165.463/kg, selisih 40.8%.</a:t>
+              <a:t>Daging Sapi: Nusa Tenggara Timur Rp117.569/kg vs Kalimantan Selatan Rp165.541/kg, selisih 40.8%.</a:t>
             </a:r>
           </a:p>
           <a:p>
@@ -7837,7 +7837,7 @@
                 </a:solidFill>
                 <a:latin typeface="Noto Sans"/>
               </a:rPr>
-              <a:t>Minyak Goreng: Kepulauan Riau vs Gorontalo (selisih 36.3%); Gula Pasir: Sulawesi Selatan vs Papua (selisih 37.1%).</a:t>
+              <a:t>Minyak Goreng: Kepulauan Riau vs Gorontalo (selisih 36.3%); Gula Pasir: Sulawesi Selatan vs Papua (selisih 36.9%).</a:t>
             </a:r>
           </a:p>
           <a:p>
